--- a/Ndakina-capstone three.pptx
+++ b/Ndakina-capstone three.pptx
@@ -112,11 +112,6 @@
       </a:defRPr>
     </a:lvl9pPr>
   </p:defaultTextStyle>
-  <p:extLst>
-    <p:ext uri="{EFAFB233-063F-42B5-8137-9DF3F51BA10A}">
-      <p15:sldGuideLst xmlns:p15="http://schemas.microsoft.com/office/powerpoint/2012/main"/>
-    </p:ext>
-  </p:extLst>
 </p:presentation>
 </file>
 
@@ -3279,7 +3274,7 @@
           <a:p>
             <a:fld id="{C128FA71-3A18-48C0-980F-4B68F7F63042}" type="datetime1">
               <a:rPr lang="en-US" smtClean="0"/>
-              <a:t>6/24/2026</a:t>
+              <a:t>6/25/2026</a:t>
             </a:fld>
             <a:endParaRPr lang="en-US"/>
           </a:p>
@@ -3487,7 +3482,7 @@
           <a:p>
             <a:fld id="{7104EDB3-C0E8-45F8-9E1D-1B6C8D1880C0}" type="datetime1">
               <a:rPr lang="en-US" smtClean="0"/>
-              <a:t>6/24/2026</a:t>
+              <a:t>6/25/2026</a:t>
             </a:fld>
             <a:endParaRPr lang="en-US"/>
           </a:p>
@@ -3695,7 +3690,7 @@
           <a:p>
             <a:fld id="{9CF0EC4B-54ED-4041-B552-9BA760FA3DBA}" type="datetime1">
               <a:rPr lang="en-US" smtClean="0"/>
-              <a:t>6/24/2026</a:t>
+              <a:t>6/25/2026</a:t>
             </a:fld>
             <a:endParaRPr lang="en-US"/>
           </a:p>
@@ -3893,7 +3888,7 @@
           <a:p>
             <a:fld id="{51C1210E-201E-4473-82AC-2466F5386C38}" type="datetime1">
               <a:rPr lang="en-US" smtClean="0"/>
-              <a:t>6/24/2026</a:t>
+              <a:t>6/25/2026</a:t>
             </a:fld>
             <a:endParaRPr lang="en-US"/>
           </a:p>
@@ -4170,7 +4165,7 @@
           <a:p>
             <a:fld id="{B01EA198-6CAB-4B8F-B93F-1F9C8C4B6CE7}" type="datetime1">
               <a:rPr lang="en-US" smtClean="0"/>
-              <a:t>6/24/2026</a:t>
+              <a:t>6/25/2026</a:t>
             </a:fld>
             <a:endParaRPr lang="en-US"/>
           </a:p>
@@ -4440,7 +4435,7 @@
           <a:p>
             <a:fld id="{CA06041F-4525-44D5-AA4F-332294BF1F56}" type="datetime1">
               <a:rPr lang="en-US" smtClean="0"/>
-              <a:t>6/24/2026</a:t>
+              <a:t>6/25/2026</a:t>
             </a:fld>
             <a:endParaRPr lang="en-US"/>
           </a:p>
@@ -4862,7 +4857,7 @@
           <a:p>
             <a:fld id="{F9557091-BBDF-4EB9-BA6B-2BB67AC4FC0F}" type="datetime1">
               <a:rPr lang="en-US" smtClean="0"/>
-              <a:t>6/24/2026</a:t>
+              <a:t>6/25/2026</a:t>
             </a:fld>
             <a:endParaRPr lang="en-US"/>
           </a:p>
@@ -5003,7 +4998,7 @@
           <a:p>
             <a:fld id="{2D6B226B-77A6-410C-9796-083F278E0125}" type="datetime1">
               <a:rPr lang="en-US" smtClean="0"/>
-              <a:t>6/24/2026</a:t>
+              <a:t>6/25/2026</a:t>
             </a:fld>
             <a:endParaRPr lang="en-US"/>
           </a:p>
@@ -5116,7 +5111,7 @@
           <a:p>
             <a:fld id="{A23A578B-D289-4C40-8593-3D356C49DA58}" type="datetime1">
               <a:rPr lang="en-US" smtClean="0"/>
-              <a:t>6/24/2026</a:t>
+              <a:t>6/25/2026</a:t>
             </a:fld>
             <a:endParaRPr lang="en-US"/>
           </a:p>
@@ -5433,7 +5428,7 @@
           <a:p>
             <a:fld id="{713DFAE3-14DB-48A7-A80F-80DDB072CE3D}" type="datetime1">
               <a:rPr lang="en-US" smtClean="0"/>
-              <a:t>6/24/2026</a:t>
+              <a:t>6/25/2026</a:t>
             </a:fld>
             <a:endParaRPr lang="en-US"/>
           </a:p>
@@ -5726,7 +5721,7 @@
           <a:p>
             <a:fld id="{92C5EAEF-6478-4102-8F5D-A5FE9FC97ACB}" type="datetime1">
               <a:rPr lang="en-US" smtClean="0"/>
-              <a:t>6/24/2026</a:t>
+              <a:t>6/25/2026</a:t>
             </a:fld>
             <a:endParaRPr lang="en-US"/>
           </a:p>
@@ -5965,7 +5960,7 @@
           <a:p>
             <a:fld id="{67F45AC6-C491-4585-A584-9CE2AF7D5500}" type="datetime1">
               <a:rPr lang="en-US" smtClean="0"/>
-              <a:t>6/24/2026</a:t>
+              <a:t>6/25/2026</a:t>
             </a:fld>
             <a:endParaRPr lang="en-US"/>
           </a:p>
@@ -9145,7 +9140,7 @@
               </a:spcAft>
             </a:pPr>
             <a:r>
-              <a:rPr lang="en-GB" sz="1800" dirty="0">
+              <a:rPr lang="en-GB" sz="1800">
                 <a:solidFill>
                   <a:srgbClr val="000000"/>
                 </a:solidFill>
@@ -9156,7 +9151,7 @@
               </a:rPr>
               <a:t>Microsoft Power BI</a:t>
             </a:r>
-            <a:endParaRPr lang="en-IE" sz="1200" dirty="0">
+            <a:endParaRPr lang="en-IE" sz="1200">
               <a:effectLst/>
               <a:latin typeface="Segoe UI Light" panose="020B0502040204020203" pitchFamily="34" charset="0"/>
               <a:ea typeface="Calibri" panose="020F0502020204030204" pitchFamily="34" charset="0"/>
@@ -9225,7 +9220,18 @@
               <p:nvPr/>
             </p:nvPicPr>
             <p:blipFill>
-              <a:blip r:embed="rId4"/>
+              <a:blip r:embed="rId4">
+                <a:clrChange>
+                  <a:clrFrom>
+                    <a:prstClr val="black"/>
+                  </a:clrFrom>
+                  <a:clrTo>
+                    <a:prstClr val="black">
+                      <a:alpha val="0"/>
+                    </a:prstClr>
+                  </a:clrTo>
+                </a:clrChange>
+              </a:blip>
               <a:stretch>
                 <a:fillRect/>
               </a:stretch>
@@ -9294,7 +9300,7 @@
           <a:lstStyle/>
           <a:p>
             <a:r>
-              <a:rPr lang="en-US" dirty="0"/>
+              <a:rPr lang="en-US"/>
               <a:t>Git hub Repository</a:t>
             </a:r>
           </a:p>

--- a/Ndakina-capstone three.pptx
+++ b/Ndakina-capstone three.pptx
@@ -13,7 +13,8 @@
     <p:sldId id="261" r:id="rId7"/>
     <p:sldId id="262" r:id="rId8"/>
     <p:sldId id="264" r:id="rId9"/>
-    <p:sldId id="265" r:id="rId10"/>
+    <p:sldId id="266" r:id="rId10"/>
+    <p:sldId id="265" r:id="rId11"/>
   </p:sldIdLst>
   <p:sldSz cx="12192000" cy="6858000"/>
   <p:notesSz cx="6858000" cy="9144000"/>
@@ -122,106 +123,10 @@
     <p1510:client id="{45561B42-89C6-08B4-CDD2-A9C91B774E41}" v="887" dt="2026-06-24T20:12:53.427"/>
     <p1510:client id="{4CFD10D2-6EDE-4144-AC8A-9E60A5632AB1}" v="19" dt="2026-06-24T22:01:59.458"/>
     <p1510:client id="{5E45F925-CBD3-9B29-D069-41564B64C3E6}" v="6" dt="2026-06-24T15:45:40.218"/>
+    <p1510:client id="{9E278863-42AA-D1C2-E401-118663D0B128}" v="286" dt="2026-06-25T21:39:04.822"/>
     <p1510:client id="{BF1D8B0C-B887-F811-8FDB-1CCBA2F344A6}" v="361" dt="2026-06-24T20:05:03.232"/>
   </p1510:revLst>
 </p1510:revInfo>
-</file>
-
-<file path=ppt/changesInfos/changesInfo1.xml><?xml version="1.0" encoding="utf-8"?>
-<pc:chgInfo xmlns:a="http://schemas.openxmlformats.org/drawingml/2006/main" xmlns:r="http://schemas.openxmlformats.org/officeDocument/2006/relationships" xmlns:ac="http://schemas.microsoft.com/office/drawing/2013/main/command" xmlns:pc="http://schemas.microsoft.com/office/powerpoint/2013/main/command">
-  <pc:docChgLst>
-    <pc:chgData name="calebndifon2@gmail.com" userId="81ca02095870d75e" providerId="LiveId" clId="{F05DC02D-E9D4-4DE0-95D6-6F30518E5AB5}"/>
-    <pc:docChg chg="custSel addSld delSld modSld">
-      <pc:chgData name="calebndifon2@gmail.com" userId="81ca02095870d75e" providerId="LiveId" clId="{F05DC02D-E9D4-4DE0-95D6-6F30518E5AB5}" dt="2026-06-24T22:01:59.458" v="200"/>
-      <pc:docMkLst>
-        <pc:docMk/>
-      </pc:docMkLst>
-      <pc:sldChg chg="setBg">
-        <pc:chgData name="calebndifon2@gmail.com" userId="81ca02095870d75e" providerId="LiveId" clId="{F05DC02D-E9D4-4DE0-95D6-6F30518E5AB5}" dt="2026-06-24T22:01:59.458" v="200"/>
-        <pc:sldMkLst>
-          <pc:docMk/>
-          <pc:sldMk cId="109857222" sldId="256"/>
-        </pc:sldMkLst>
-      </pc:sldChg>
-      <pc:sldChg chg="add">
-        <pc:chgData name="calebndifon2@gmail.com" userId="81ca02095870d75e" providerId="LiveId" clId="{F05DC02D-E9D4-4DE0-95D6-6F30518E5AB5}" dt="2026-06-24T21:50:41.426" v="5"/>
-        <pc:sldMkLst>
-          <pc:docMk/>
-          <pc:sldMk cId="3211859542" sldId="264"/>
-        </pc:sldMkLst>
-      </pc:sldChg>
-      <pc:sldChg chg="delSp new del mod modClrScheme chgLayout">
-        <pc:chgData name="calebndifon2@gmail.com" userId="81ca02095870d75e" providerId="LiveId" clId="{F05DC02D-E9D4-4DE0-95D6-6F30518E5AB5}" dt="2026-06-24T21:13:25.435" v="3" actId="47"/>
-        <pc:sldMkLst>
-          <pc:docMk/>
-          <pc:sldMk cId="3522524093" sldId="264"/>
-        </pc:sldMkLst>
-        <pc:spChg chg="del">
-          <ac:chgData name="calebndifon2@gmail.com" userId="81ca02095870d75e" providerId="LiveId" clId="{F05DC02D-E9D4-4DE0-95D6-6F30518E5AB5}" dt="2026-06-24T21:13:08.202" v="1" actId="700"/>
-          <ac:spMkLst>
-            <pc:docMk/>
-            <pc:sldMk cId="3522524093" sldId="264"/>
-            <ac:spMk id="2" creationId="{852E752A-F915-C2E9-3FCA-0ACA6D50208D}"/>
-          </ac:spMkLst>
-        </pc:spChg>
-        <pc:spChg chg="del">
-          <ac:chgData name="calebndifon2@gmail.com" userId="81ca02095870d75e" providerId="LiveId" clId="{F05DC02D-E9D4-4DE0-95D6-6F30518E5AB5}" dt="2026-06-24T21:13:08.202" v="1" actId="700"/>
-          <ac:spMkLst>
-            <pc:docMk/>
-            <pc:sldMk cId="3522524093" sldId="264"/>
-            <ac:spMk id="3" creationId="{AEA82098-05CC-555B-50FB-6CC917F373C9}"/>
-          </ac:spMkLst>
-        </pc:spChg>
-        <pc:spChg chg="del">
-          <ac:chgData name="calebndifon2@gmail.com" userId="81ca02095870d75e" providerId="LiveId" clId="{F05DC02D-E9D4-4DE0-95D6-6F30518E5AB5}" dt="2026-06-24T21:13:08.202" v="1" actId="700"/>
-          <ac:spMkLst>
-            <pc:docMk/>
-            <pc:sldMk cId="3522524093" sldId="264"/>
-            <ac:spMk id="4" creationId="{0915FC12-186B-3A9C-FB77-607D978F1339}"/>
-          </ac:spMkLst>
-        </pc:spChg>
-      </pc:sldChg>
-      <pc:sldChg chg="add del">
-        <pc:chgData name="calebndifon2@gmail.com" userId="81ca02095870d75e" providerId="LiveId" clId="{F05DC02D-E9D4-4DE0-95D6-6F30518E5AB5}" dt="2026-06-24T21:14:14.842" v="4" actId="47"/>
-        <pc:sldMkLst>
-          <pc:docMk/>
-          <pc:sldMk cId="3211859542" sldId="265"/>
-        </pc:sldMkLst>
-      </pc:sldChg>
-      <pc:sldChg chg="addSp delSp modSp new mod">
-        <pc:chgData name="calebndifon2@gmail.com" userId="81ca02095870d75e" providerId="LiveId" clId="{F05DC02D-E9D4-4DE0-95D6-6F30518E5AB5}" dt="2026-06-24T22:00:24.781" v="194" actId="26606"/>
-        <pc:sldMkLst>
-          <pc:docMk/>
-          <pc:sldMk cId="4088217422" sldId="265"/>
-        </pc:sldMkLst>
-        <pc:spChg chg="mod">
-          <ac:chgData name="calebndifon2@gmail.com" userId="81ca02095870d75e" providerId="LiveId" clId="{F05DC02D-E9D4-4DE0-95D6-6F30518E5AB5}" dt="2026-06-24T21:53:53.700" v="39" actId="20577"/>
-          <ac:spMkLst>
-            <pc:docMk/>
-            <pc:sldMk cId="4088217422" sldId="265"/>
-            <ac:spMk id="2" creationId="{E0CCC684-44D2-C0FE-9E76-492D846D50DE}"/>
-          </ac:spMkLst>
-        </pc:spChg>
-        <pc:spChg chg="del mod">
-          <ac:chgData name="calebndifon2@gmail.com" userId="81ca02095870d75e" providerId="LiveId" clId="{F05DC02D-E9D4-4DE0-95D6-6F30518E5AB5}" dt="2026-06-24T22:00:24.781" v="194" actId="26606"/>
-          <ac:spMkLst>
-            <pc:docMk/>
-            <pc:sldMk cId="4088217422" sldId="265"/>
-            <ac:spMk id="3" creationId="{24F83203-BD9B-96BC-2EF5-E2BF429D198F}"/>
-          </ac:spMkLst>
-        </pc:spChg>
-        <pc:graphicFrameChg chg="add">
-          <ac:chgData name="calebndifon2@gmail.com" userId="81ca02095870d75e" providerId="LiveId" clId="{F05DC02D-E9D4-4DE0-95D6-6F30518E5AB5}" dt="2026-06-24T22:00:24.781" v="194" actId="26606"/>
-          <ac:graphicFrameMkLst>
-            <pc:docMk/>
-            <pc:sldMk cId="4088217422" sldId="265"/>
-            <ac:graphicFrameMk id="5" creationId="{4EC9BE1A-80EC-7A3D-7D33-F52BB11B2E48}"/>
-          </ac:graphicFrameMkLst>
-        </pc:graphicFrameChg>
-      </pc:sldChg>
-    </pc:docChg>
-  </pc:docChgLst>
-</pc:chgInfo>
 </file>
 
 <file path=ppt/diagrams/colors1.xml><?xml version="1.0" encoding="utf-8"?>
@@ -971,7 +876,928 @@
 </dgm:colorsDef>
 </file>
 
+<file path=ppt/diagrams/colors2.xml><?xml version="1.0" encoding="utf-8"?>
+<dgm:colorsDef xmlns:dgm="http://schemas.openxmlformats.org/drawingml/2006/diagram" xmlns:a="http://schemas.openxmlformats.org/drawingml/2006/main" uniqueId="urn:microsoft.com/office/officeart/2005/8/colors/accent1_2">
+  <dgm:title val=""/>
+  <dgm:desc val=""/>
+  <dgm:catLst>
+    <dgm:cat type="accent1" pri="11200"/>
+  </dgm:catLst>
+  <dgm:styleLbl name="node0">
+    <dgm:fillClrLst meth="repeat">
+      <a:schemeClr val="accent1"/>
+    </dgm:fillClrLst>
+    <dgm:linClrLst meth="repeat">
+      <a:schemeClr val="lt1"/>
+    </dgm:linClrLst>
+    <dgm:effectClrLst/>
+    <dgm:txLinClrLst/>
+    <dgm:txFillClrLst/>
+    <dgm:txEffectClrLst/>
+  </dgm:styleLbl>
+  <dgm:styleLbl name="alignNode1">
+    <dgm:fillClrLst meth="repeat">
+      <a:schemeClr val="accent1"/>
+    </dgm:fillClrLst>
+    <dgm:linClrLst meth="repeat">
+      <a:schemeClr val="accent1"/>
+    </dgm:linClrLst>
+    <dgm:effectClrLst/>
+    <dgm:txLinClrLst/>
+    <dgm:txFillClrLst/>
+    <dgm:txEffectClrLst/>
+  </dgm:styleLbl>
+  <dgm:styleLbl name="node1">
+    <dgm:fillClrLst meth="repeat">
+      <a:schemeClr val="accent1"/>
+    </dgm:fillClrLst>
+    <dgm:linClrLst meth="repeat">
+      <a:schemeClr val="lt1"/>
+    </dgm:linClrLst>
+    <dgm:effectClrLst/>
+    <dgm:txLinClrLst/>
+    <dgm:txFillClrLst/>
+    <dgm:txEffectClrLst/>
+  </dgm:styleLbl>
+  <dgm:styleLbl name="lnNode1">
+    <dgm:fillClrLst meth="repeat">
+      <a:schemeClr val="accent1"/>
+    </dgm:fillClrLst>
+    <dgm:linClrLst meth="repeat">
+      <a:schemeClr val="lt1"/>
+    </dgm:linClrLst>
+    <dgm:effectClrLst/>
+    <dgm:txLinClrLst/>
+    <dgm:txFillClrLst/>
+    <dgm:txEffectClrLst/>
+  </dgm:styleLbl>
+  <dgm:styleLbl name="vennNode1">
+    <dgm:fillClrLst meth="repeat">
+      <a:schemeClr val="accent1">
+        <a:alpha val="50000"/>
+      </a:schemeClr>
+    </dgm:fillClrLst>
+    <dgm:linClrLst meth="repeat">
+      <a:schemeClr val="lt1"/>
+    </dgm:linClrLst>
+    <dgm:effectClrLst/>
+    <dgm:txLinClrLst/>
+    <dgm:txFillClrLst/>
+    <dgm:txEffectClrLst/>
+  </dgm:styleLbl>
+  <dgm:styleLbl name="node2">
+    <dgm:fillClrLst meth="repeat">
+      <a:schemeClr val="accent1"/>
+    </dgm:fillClrLst>
+    <dgm:linClrLst meth="repeat">
+      <a:schemeClr val="lt1"/>
+    </dgm:linClrLst>
+    <dgm:effectClrLst/>
+    <dgm:txLinClrLst/>
+    <dgm:txFillClrLst/>
+    <dgm:txEffectClrLst/>
+  </dgm:styleLbl>
+  <dgm:styleLbl name="node3">
+    <dgm:fillClrLst meth="repeat">
+      <a:schemeClr val="accent1"/>
+    </dgm:fillClrLst>
+    <dgm:linClrLst meth="repeat">
+      <a:schemeClr val="lt1"/>
+    </dgm:linClrLst>
+    <dgm:effectClrLst/>
+    <dgm:txLinClrLst/>
+    <dgm:txFillClrLst/>
+    <dgm:txEffectClrLst/>
+  </dgm:styleLbl>
+  <dgm:styleLbl name="node4">
+    <dgm:fillClrLst meth="repeat">
+      <a:schemeClr val="accent1"/>
+    </dgm:fillClrLst>
+    <dgm:linClrLst meth="repeat">
+      <a:schemeClr val="lt1"/>
+    </dgm:linClrLst>
+    <dgm:effectClrLst/>
+    <dgm:txLinClrLst/>
+    <dgm:txFillClrLst/>
+    <dgm:txEffectClrLst/>
+  </dgm:styleLbl>
+  <dgm:styleLbl name="fgImgPlace1">
+    <dgm:fillClrLst meth="repeat">
+      <a:schemeClr val="accent1">
+        <a:tint val="50000"/>
+      </a:schemeClr>
+    </dgm:fillClrLst>
+    <dgm:linClrLst meth="repeat">
+      <a:schemeClr val="lt1"/>
+    </dgm:linClrLst>
+    <dgm:effectClrLst/>
+    <dgm:txLinClrLst/>
+    <dgm:txFillClrLst meth="repeat">
+      <a:schemeClr val="lt1"/>
+    </dgm:txFillClrLst>
+    <dgm:txEffectClrLst/>
+  </dgm:styleLbl>
+  <dgm:styleLbl name="alignImgPlace1">
+    <dgm:fillClrLst meth="repeat">
+      <a:schemeClr val="accent1">
+        <a:tint val="50000"/>
+      </a:schemeClr>
+    </dgm:fillClrLst>
+    <dgm:linClrLst meth="repeat">
+      <a:schemeClr val="lt1"/>
+    </dgm:linClrLst>
+    <dgm:effectClrLst/>
+    <dgm:txLinClrLst/>
+    <dgm:txFillClrLst meth="repeat">
+      <a:schemeClr val="lt1"/>
+    </dgm:txFillClrLst>
+    <dgm:txEffectClrLst/>
+  </dgm:styleLbl>
+  <dgm:styleLbl name="bgImgPlace1">
+    <dgm:fillClrLst meth="repeat">
+      <a:schemeClr val="accent1">
+        <a:tint val="50000"/>
+      </a:schemeClr>
+    </dgm:fillClrLst>
+    <dgm:linClrLst meth="repeat">
+      <a:schemeClr val="lt1"/>
+    </dgm:linClrLst>
+    <dgm:effectClrLst/>
+    <dgm:txLinClrLst/>
+    <dgm:txFillClrLst meth="repeat">
+      <a:schemeClr val="lt1"/>
+    </dgm:txFillClrLst>
+    <dgm:txEffectClrLst/>
+  </dgm:styleLbl>
+  <dgm:styleLbl name="sibTrans2D1">
+    <dgm:fillClrLst meth="repeat">
+      <a:schemeClr val="accent1">
+        <a:tint val="60000"/>
+      </a:schemeClr>
+    </dgm:fillClrLst>
+    <dgm:linClrLst meth="repeat">
+      <a:schemeClr val="accent1">
+        <a:tint val="60000"/>
+      </a:schemeClr>
+    </dgm:linClrLst>
+    <dgm:effectClrLst/>
+    <dgm:txLinClrLst/>
+    <dgm:txFillClrLst/>
+    <dgm:txEffectClrLst/>
+  </dgm:styleLbl>
+  <dgm:styleLbl name="fgSibTrans2D1">
+    <dgm:fillClrLst meth="repeat">
+      <a:schemeClr val="accent1">
+        <a:tint val="60000"/>
+      </a:schemeClr>
+    </dgm:fillClrLst>
+    <dgm:linClrLst meth="repeat">
+      <a:schemeClr val="accent1">
+        <a:tint val="60000"/>
+      </a:schemeClr>
+    </dgm:linClrLst>
+    <dgm:effectClrLst/>
+    <dgm:txLinClrLst/>
+    <dgm:txFillClrLst/>
+    <dgm:txEffectClrLst/>
+  </dgm:styleLbl>
+  <dgm:styleLbl name="bgSibTrans2D1">
+    <dgm:fillClrLst meth="repeat">
+      <a:schemeClr val="accent1">
+        <a:tint val="60000"/>
+      </a:schemeClr>
+    </dgm:fillClrLst>
+    <dgm:linClrLst meth="repeat">
+      <a:schemeClr val="accent1">
+        <a:tint val="60000"/>
+      </a:schemeClr>
+    </dgm:linClrLst>
+    <dgm:effectClrLst/>
+    <dgm:txLinClrLst/>
+    <dgm:txFillClrLst/>
+    <dgm:txEffectClrLst/>
+  </dgm:styleLbl>
+  <dgm:styleLbl name="sibTrans1D1">
+    <dgm:fillClrLst meth="repeat">
+      <a:schemeClr val="accent1"/>
+    </dgm:fillClrLst>
+    <dgm:linClrLst meth="repeat">
+      <a:schemeClr val="accent1"/>
+    </dgm:linClrLst>
+    <dgm:effectClrLst/>
+    <dgm:txLinClrLst/>
+    <dgm:txFillClrLst meth="repeat">
+      <a:schemeClr val="tx1"/>
+    </dgm:txFillClrLst>
+    <dgm:txEffectClrLst/>
+  </dgm:styleLbl>
+  <dgm:styleLbl name="callout">
+    <dgm:fillClrLst meth="repeat">
+      <a:schemeClr val="accent1"/>
+    </dgm:fillClrLst>
+    <dgm:linClrLst meth="repeat">
+      <a:schemeClr val="accent1">
+        <a:tint val="50000"/>
+      </a:schemeClr>
+    </dgm:linClrLst>
+    <dgm:effectClrLst/>
+    <dgm:txLinClrLst/>
+    <dgm:txFillClrLst meth="repeat">
+      <a:schemeClr val="tx1"/>
+    </dgm:txFillClrLst>
+    <dgm:txEffectClrLst/>
+  </dgm:styleLbl>
+  <dgm:styleLbl name="asst0">
+    <dgm:fillClrLst meth="repeat">
+      <a:schemeClr val="accent1"/>
+    </dgm:fillClrLst>
+    <dgm:linClrLst meth="repeat">
+      <a:schemeClr val="lt1"/>
+    </dgm:linClrLst>
+    <dgm:effectClrLst/>
+    <dgm:txLinClrLst/>
+    <dgm:txFillClrLst/>
+    <dgm:txEffectClrLst/>
+  </dgm:styleLbl>
+  <dgm:styleLbl name="asst1">
+    <dgm:fillClrLst meth="repeat">
+      <a:schemeClr val="accent1"/>
+    </dgm:fillClrLst>
+    <dgm:linClrLst meth="repeat">
+      <a:schemeClr val="lt1"/>
+    </dgm:linClrLst>
+    <dgm:effectClrLst/>
+    <dgm:txLinClrLst/>
+    <dgm:txFillClrLst/>
+    <dgm:txEffectClrLst/>
+  </dgm:styleLbl>
+  <dgm:styleLbl name="asst2">
+    <dgm:fillClrLst meth="repeat">
+      <a:schemeClr val="accent1"/>
+    </dgm:fillClrLst>
+    <dgm:linClrLst meth="repeat">
+      <a:schemeClr val="lt1"/>
+    </dgm:linClrLst>
+    <dgm:effectClrLst/>
+    <dgm:txLinClrLst/>
+    <dgm:txFillClrLst/>
+    <dgm:txEffectClrLst/>
+  </dgm:styleLbl>
+  <dgm:styleLbl name="asst3">
+    <dgm:fillClrLst meth="repeat">
+      <a:schemeClr val="accent1"/>
+    </dgm:fillClrLst>
+    <dgm:linClrLst meth="repeat">
+      <a:schemeClr val="lt1"/>
+    </dgm:linClrLst>
+    <dgm:effectClrLst/>
+    <dgm:txLinClrLst/>
+    <dgm:txFillClrLst/>
+    <dgm:txEffectClrLst/>
+  </dgm:styleLbl>
+  <dgm:styleLbl name="asst4">
+    <dgm:fillClrLst meth="repeat">
+      <a:schemeClr val="accent1"/>
+    </dgm:fillClrLst>
+    <dgm:linClrLst meth="repeat">
+      <a:schemeClr val="lt1"/>
+    </dgm:linClrLst>
+    <dgm:effectClrLst/>
+    <dgm:txLinClrLst/>
+    <dgm:txFillClrLst/>
+    <dgm:txEffectClrLst/>
+  </dgm:styleLbl>
+  <dgm:styleLbl name="parChTrans2D1">
+    <dgm:fillClrLst meth="repeat">
+      <a:schemeClr val="accent1">
+        <a:tint val="60000"/>
+      </a:schemeClr>
+    </dgm:fillClrLst>
+    <dgm:linClrLst meth="repeat">
+      <a:schemeClr val="accent1">
+        <a:tint val="60000"/>
+      </a:schemeClr>
+    </dgm:linClrLst>
+    <dgm:effectClrLst/>
+    <dgm:txLinClrLst/>
+    <dgm:txFillClrLst meth="repeat">
+      <a:schemeClr val="lt1"/>
+    </dgm:txFillClrLst>
+    <dgm:txEffectClrLst/>
+  </dgm:styleLbl>
+  <dgm:styleLbl name="parChTrans2D2">
+    <dgm:fillClrLst meth="repeat">
+      <a:schemeClr val="accent1"/>
+    </dgm:fillClrLst>
+    <dgm:linClrLst meth="repeat">
+      <a:schemeClr val="accent1"/>
+    </dgm:linClrLst>
+    <dgm:effectClrLst/>
+    <dgm:txLinClrLst/>
+    <dgm:txFillClrLst meth="repeat">
+      <a:schemeClr val="lt1"/>
+    </dgm:txFillClrLst>
+    <dgm:txEffectClrLst/>
+  </dgm:styleLbl>
+  <dgm:styleLbl name="parChTrans2D3">
+    <dgm:fillClrLst meth="repeat">
+      <a:schemeClr val="accent1"/>
+    </dgm:fillClrLst>
+    <dgm:linClrLst meth="repeat">
+      <a:schemeClr val="accent1"/>
+    </dgm:linClrLst>
+    <dgm:effectClrLst/>
+    <dgm:txLinClrLst/>
+    <dgm:txFillClrLst meth="repeat">
+      <a:schemeClr val="lt1"/>
+    </dgm:txFillClrLst>
+    <dgm:txEffectClrLst/>
+  </dgm:styleLbl>
+  <dgm:styleLbl name="parChTrans2D4">
+    <dgm:fillClrLst meth="repeat">
+      <a:schemeClr val="accent1"/>
+    </dgm:fillClrLst>
+    <dgm:linClrLst meth="repeat">
+      <a:schemeClr val="accent1"/>
+    </dgm:linClrLst>
+    <dgm:effectClrLst/>
+    <dgm:txLinClrLst/>
+    <dgm:txFillClrLst meth="repeat">
+      <a:schemeClr val="lt1"/>
+    </dgm:txFillClrLst>
+    <dgm:txEffectClrLst/>
+  </dgm:styleLbl>
+  <dgm:styleLbl name="parChTrans1D1">
+    <dgm:fillClrLst meth="repeat">
+      <a:schemeClr val="accent1"/>
+    </dgm:fillClrLst>
+    <dgm:linClrLst meth="repeat">
+      <a:schemeClr val="accent1">
+        <a:shade val="60000"/>
+      </a:schemeClr>
+    </dgm:linClrLst>
+    <dgm:effectClrLst/>
+    <dgm:txLinClrLst/>
+    <dgm:txFillClrLst meth="repeat">
+      <a:schemeClr val="tx1"/>
+    </dgm:txFillClrLst>
+    <dgm:txEffectClrLst/>
+  </dgm:styleLbl>
+  <dgm:styleLbl name="parChTrans1D2">
+    <dgm:fillClrLst meth="repeat">
+      <a:schemeClr val="accent1"/>
+    </dgm:fillClrLst>
+    <dgm:linClrLst meth="repeat">
+      <a:schemeClr val="accent1">
+        <a:shade val="60000"/>
+      </a:schemeClr>
+    </dgm:linClrLst>
+    <dgm:effectClrLst/>
+    <dgm:txLinClrLst/>
+    <dgm:txFillClrLst meth="repeat">
+      <a:schemeClr val="tx1"/>
+    </dgm:txFillClrLst>
+    <dgm:txEffectClrLst/>
+  </dgm:styleLbl>
+  <dgm:styleLbl name="parChTrans1D3">
+    <dgm:fillClrLst meth="repeat">
+      <a:schemeClr val="accent1"/>
+    </dgm:fillClrLst>
+    <dgm:linClrLst meth="repeat">
+      <a:schemeClr val="accent1">
+        <a:shade val="80000"/>
+      </a:schemeClr>
+    </dgm:linClrLst>
+    <dgm:effectClrLst/>
+    <dgm:txLinClrLst/>
+    <dgm:txFillClrLst meth="repeat">
+      <a:schemeClr val="tx1"/>
+    </dgm:txFillClrLst>
+    <dgm:txEffectClrLst/>
+  </dgm:styleLbl>
+  <dgm:styleLbl name="parChTrans1D4">
+    <dgm:fillClrLst meth="repeat">
+      <a:schemeClr val="accent1"/>
+    </dgm:fillClrLst>
+    <dgm:linClrLst meth="repeat">
+      <a:schemeClr val="accent1">
+        <a:shade val="80000"/>
+      </a:schemeClr>
+    </dgm:linClrLst>
+    <dgm:effectClrLst/>
+    <dgm:txLinClrLst/>
+    <dgm:txFillClrLst meth="repeat">
+      <a:schemeClr val="tx1"/>
+    </dgm:txFillClrLst>
+    <dgm:txEffectClrLst/>
+  </dgm:styleLbl>
+  <dgm:styleLbl name="fgAcc1">
+    <dgm:fillClrLst meth="repeat">
+      <a:schemeClr val="lt1">
+        <a:alpha val="90000"/>
+      </a:schemeClr>
+    </dgm:fillClrLst>
+    <dgm:linClrLst meth="repeat">
+      <a:schemeClr val="accent1"/>
+    </dgm:linClrLst>
+    <dgm:effectClrLst/>
+    <dgm:txLinClrLst/>
+    <dgm:txFillClrLst meth="repeat">
+      <a:schemeClr val="dk1"/>
+    </dgm:txFillClrLst>
+    <dgm:txEffectClrLst/>
+  </dgm:styleLbl>
+  <dgm:styleLbl name="conFgAcc1">
+    <dgm:fillClrLst meth="repeat">
+      <a:schemeClr val="lt1">
+        <a:alpha val="90000"/>
+      </a:schemeClr>
+    </dgm:fillClrLst>
+    <dgm:linClrLst meth="repeat">
+      <a:schemeClr val="accent1"/>
+    </dgm:linClrLst>
+    <dgm:effectClrLst/>
+    <dgm:txLinClrLst/>
+    <dgm:txFillClrLst meth="repeat">
+      <a:schemeClr val="dk1"/>
+    </dgm:txFillClrLst>
+    <dgm:txEffectClrLst/>
+  </dgm:styleLbl>
+  <dgm:styleLbl name="alignAcc1">
+    <dgm:fillClrLst meth="repeat">
+      <a:schemeClr val="lt1">
+        <a:alpha val="90000"/>
+      </a:schemeClr>
+    </dgm:fillClrLst>
+    <dgm:linClrLst meth="repeat">
+      <a:schemeClr val="accent1"/>
+    </dgm:linClrLst>
+    <dgm:effectClrLst/>
+    <dgm:txLinClrLst/>
+    <dgm:txFillClrLst meth="repeat">
+      <a:schemeClr val="dk1"/>
+    </dgm:txFillClrLst>
+    <dgm:txEffectClrLst/>
+  </dgm:styleLbl>
+  <dgm:styleLbl name="trAlignAcc1">
+    <dgm:fillClrLst meth="repeat">
+      <a:schemeClr val="lt1">
+        <a:alpha val="40000"/>
+      </a:schemeClr>
+    </dgm:fillClrLst>
+    <dgm:linClrLst meth="repeat">
+      <a:schemeClr val="accent1"/>
+    </dgm:linClrLst>
+    <dgm:effectClrLst/>
+    <dgm:txLinClrLst/>
+    <dgm:txFillClrLst meth="repeat">
+      <a:schemeClr val="dk1"/>
+    </dgm:txFillClrLst>
+    <dgm:txEffectClrLst/>
+  </dgm:styleLbl>
+  <dgm:styleLbl name="bgAcc1">
+    <dgm:fillClrLst meth="repeat">
+      <a:schemeClr val="lt1">
+        <a:alpha val="90000"/>
+      </a:schemeClr>
+    </dgm:fillClrLst>
+    <dgm:linClrLst meth="repeat">
+      <a:schemeClr val="accent1"/>
+    </dgm:linClrLst>
+    <dgm:effectClrLst/>
+    <dgm:txLinClrLst/>
+    <dgm:txFillClrLst meth="repeat">
+      <a:schemeClr val="dk1"/>
+    </dgm:txFillClrLst>
+    <dgm:txEffectClrLst/>
+  </dgm:styleLbl>
+  <dgm:styleLbl name="solidFgAcc1">
+    <dgm:fillClrLst meth="repeat">
+      <a:schemeClr val="lt1"/>
+    </dgm:fillClrLst>
+    <dgm:linClrLst meth="repeat">
+      <a:schemeClr val="accent1"/>
+    </dgm:linClrLst>
+    <dgm:effectClrLst/>
+    <dgm:txLinClrLst/>
+    <dgm:txFillClrLst meth="repeat">
+      <a:schemeClr val="dk1"/>
+    </dgm:txFillClrLst>
+    <dgm:txEffectClrLst/>
+  </dgm:styleLbl>
+  <dgm:styleLbl name="solidAlignAcc1">
+    <dgm:fillClrLst meth="repeat">
+      <a:schemeClr val="lt1"/>
+    </dgm:fillClrLst>
+    <dgm:linClrLst meth="repeat">
+      <a:schemeClr val="accent1"/>
+    </dgm:linClrLst>
+    <dgm:effectClrLst/>
+    <dgm:txLinClrLst/>
+    <dgm:txFillClrLst meth="repeat">
+      <a:schemeClr val="dk1"/>
+    </dgm:txFillClrLst>
+    <dgm:txEffectClrLst/>
+  </dgm:styleLbl>
+  <dgm:styleLbl name="solidBgAcc1">
+    <dgm:fillClrLst meth="repeat">
+      <a:schemeClr val="lt1"/>
+    </dgm:fillClrLst>
+    <dgm:linClrLst meth="repeat">
+      <a:schemeClr val="accent1"/>
+    </dgm:linClrLst>
+    <dgm:effectClrLst/>
+    <dgm:txLinClrLst/>
+    <dgm:txFillClrLst meth="repeat">
+      <a:schemeClr val="dk1"/>
+    </dgm:txFillClrLst>
+    <dgm:txEffectClrLst/>
+  </dgm:styleLbl>
+  <dgm:styleLbl name="fgAccFollowNode1">
+    <dgm:fillClrLst meth="repeat">
+      <a:schemeClr val="accent1">
+        <a:alpha val="90000"/>
+        <a:tint val="40000"/>
+      </a:schemeClr>
+    </dgm:fillClrLst>
+    <dgm:linClrLst meth="repeat">
+      <a:schemeClr val="accent1">
+        <a:alpha val="90000"/>
+        <a:tint val="40000"/>
+      </a:schemeClr>
+    </dgm:linClrLst>
+    <dgm:effectClrLst/>
+    <dgm:txLinClrLst/>
+    <dgm:txFillClrLst meth="repeat">
+      <a:schemeClr val="dk1"/>
+    </dgm:txFillClrLst>
+    <dgm:txEffectClrLst/>
+  </dgm:styleLbl>
+  <dgm:styleLbl name="alignAccFollowNode1">
+    <dgm:fillClrLst meth="repeat">
+      <a:schemeClr val="accent1">
+        <a:alpha val="90000"/>
+        <a:tint val="40000"/>
+      </a:schemeClr>
+    </dgm:fillClrLst>
+    <dgm:linClrLst meth="repeat">
+      <a:schemeClr val="accent1">
+        <a:alpha val="90000"/>
+        <a:tint val="40000"/>
+      </a:schemeClr>
+    </dgm:linClrLst>
+    <dgm:effectClrLst/>
+    <dgm:txLinClrLst/>
+    <dgm:txFillClrLst meth="repeat">
+      <a:schemeClr val="dk1"/>
+    </dgm:txFillClrLst>
+    <dgm:txEffectClrLst/>
+  </dgm:styleLbl>
+  <dgm:styleLbl name="bgAccFollowNode1">
+    <dgm:fillClrLst meth="repeat">
+      <a:schemeClr val="accent1">
+        <a:alpha val="90000"/>
+        <a:tint val="40000"/>
+      </a:schemeClr>
+    </dgm:fillClrLst>
+    <dgm:linClrLst meth="repeat">
+      <a:schemeClr val="accent1">
+        <a:alpha val="90000"/>
+        <a:tint val="40000"/>
+      </a:schemeClr>
+    </dgm:linClrLst>
+    <dgm:effectClrLst/>
+    <dgm:txLinClrLst/>
+    <dgm:txFillClrLst meth="repeat">
+      <a:schemeClr val="dk1"/>
+    </dgm:txFillClrLst>
+    <dgm:txEffectClrLst/>
+  </dgm:styleLbl>
+  <dgm:styleLbl name="fgAcc0">
+    <dgm:fillClrLst meth="repeat">
+      <a:schemeClr val="lt1">
+        <a:alpha val="90000"/>
+      </a:schemeClr>
+    </dgm:fillClrLst>
+    <dgm:linClrLst meth="repeat">
+      <a:schemeClr val="accent1"/>
+    </dgm:linClrLst>
+    <dgm:effectClrLst/>
+    <dgm:txLinClrLst/>
+    <dgm:txFillClrLst meth="repeat">
+      <a:schemeClr val="dk1"/>
+    </dgm:txFillClrLst>
+    <dgm:txEffectClrLst/>
+  </dgm:styleLbl>
+  <dgm:styleLbl name="fgAcc2">
+    <dgm:fillClrLst meth="repeat">
+      <a:schemeClr val="lt1">
+        <a:alpha val="90000"/>
+      </a:schemeClr>
+    </dgm:fillClrLst>
+    <dgm:linClrLst meth="repeat">
+      <a:schemeClr val="accent1"/>
+    </dgm:linClrLst>
+    <dgm:effectClrLst/>
+    <dgm:txLinClrLst/>
+    <dgm:txFillClrLst meth="repeat">
+      <a:schemeClr val="dk1"/>
+    </dgm:txFillClrLst>
+    <dgm:txEffectClrLst/>
+  </dgm:styleLbl>
+  <dgm:styleLbl name="fgAcc3">
+    <dgm:fillClrLst meth="repeat">
+      <a:schemeClr val="lt1">
+        <a:alpha val="90000"/>
+      </a:schemeClr>
+    </dgm:fillClrLst>
+    <dgm:linClrLst meth="repeat">
+      <a:schemeClr val="accent1"/>
+    </dgm:linClrLst>
+    <dgm:effectClrLst/>
+    <dgm:txLinClrLst/>
+    <dgm:txFillClrLst meth="repeat">
+      <a:schemeClr val="dk1"/>
+    </dgm:txFillClrLst>
+    <dgm:txEffectClrLst/>
+  </dgm:styleLbl>
+  <dgm:styleLbl name="fgAcc4">
+    <dgm:fillClrLst meth="repeat">
+      <a:schemeClr val="lt1">
+        <a:alpha val="90000"/>
+      </a:schemeClr>
+    </dgm:fillClrLst>
+    <dgm:linClrLst meth="repeat">
+      <a:schemeClr val="accent1"/>
+    </dgm:linClrLst>
+    <dgm:effectClrLst/>
+    <dgm:txLinClrLst/>
+    <dgm:txFillClrLst meth="repeat">
+      <a:schemeClr val="dk1"/>
+    </dgm:txFillClrLst>
+    <dgm:txEffectClrLst/>
+  </dgm:styleLbl>
+  <dgm:styleLbl name="bgShp">
+    <dgm:fillClrLst meth="repeat">
+      <a:schemeClr val="accent1">
+        <a:tint val="40000"/>
+      </a:schemeClr>
+    </dgm:fillClrLst>
+    <dgm:linClrLst meth="repeat">
+      <a:schemeClr val="accent1"/>
+    </dgm:linClrLst>
+    <dgm:effectClrLst/>
+    <dgm:txLinClrLst/>
+    <dgm:txFillClrLst meth="repeat">
+      <a:schemeClr val="dk1"/>
+    </dgm:txFillClrLst>
+    <dgm:txEffectClrLst/>
+  </dgm:styleLbl>
+  <dgm:styleLbl name="dkBgShp">
+    <dgm:fillClrLst meth="repeat">
+      <a:schemeClr val="accent1">
+        <a:shade val="80000"/>
+      </a:schemeClr>
+    </dgm:fillClrLst>
+    <dgm:linClrLst meth="repeat">
+      <a:schemeClr val="accent1"/>
+    </dgm:linClrLst>
+    <dgm:effectClrLst/>
+    <dgm:txLinClrLst/>
+    <dgm:txFillClrLst meth="repeat">
+      <a:schemeClr val="lt1"/>
+    </dgm:txFillClrLst>
+    <dgm:txEffectClrLst/>
+  </dgm:styleLbl>
+  <dgm:styleLbl name="trBgShp">
+    <dgm:fillClrLst meth="repeat">
+      <a:schemeClr val="accent1">
+        <a:tint val="50000"/>
+        <a:alpha val="40000"/>
+      </a:schemeClr>
+    </dgm:fillClrLst>
+    <dgm:linClrLst meth="repeat">
+      <a:schemeClr val="accent1"/>
+    </dgm:linClrLst>
+    <dgm:effectClrLst/>
+    <dgm:txLinClrLst/>
+    <dgm:txFillClrLst meth="repeat">
+      <a:schemeClr val="lt1"/>
+    </dgm:txFillClrLst>
+    <dgm:txEffectClrLst/>
+  </dgm:styleLbl>
+  <dgm:styleLbl name="fgShp">
+    <dgm:fillClrLst meth="repeat">
+      <a:schemeClr val="accent1">
+        <a:tint val="60000"/>
+      </a:schemeClr>
+    </dgm:fillClrLst>
+    <dgm:linClrLst meth="repeat">
+      <a:schemeClr val="lt1"/>
+    </dgm:linClrLst>
+    <dgm:effectClrLst/>
+    <dgm:txLinClrLst/>
+    <dgm:txFillClrLst meth="repeat">
+      <a:schemeClr val="dk1"/>
+    </dgm:txFillClrLst>
+    <dgm:txEffectClrLst/>
+  </dgm:styleLbl>
+  <dgm:styleLbl name="revTx">
+    <dgm:fillClrLst meth="repeat">
+      <a:schemeClr val="lt1">
+        <a:alpha val="0"/>
+      </a:schemeClr>
+    </dgm:fillClrLst>
+    <dgm:linClrLst meth="repeat">
+      <a:schemeClr val="dk1">
+        <a:alpha val="0"/>
+      </a:schemeClr>
+    </dgm:linClrLst>
+    <dgm:effectClrLst/>
+    <dgm:txLinClrLst/>
+    <dgm:txFillClrLst meth="repeat">
+      <a:schemeClr val="tx1"/>
+    </dgm:txFillClrLst>
+    <dgm:txEffectClrLst/>
+  </dgm:styleLbl>
+</dgm:colorsDef>
+</file>
+
 <file path=ppt/diagrams/data1.xml><?xml version="1.0" encoding="utf-8"?>
+<dgm:dataModel xmlns:dgm="http://schemas.openxmlformats.org/drawingml/2006/diagram" xmlns:a="http://schemas.openxmlformats.org/drawingml/2006/main">
+  <dgm:ptLst>
+    <dgm:pt modelId="{C04EAEB5-3713-42CF-90CA-4AC497E5F177}" type="doc">
+      <dgm:prSet loTypeId="urn:microsoft.com/office/officeart/2005/8/layout/hierarchy1" loCatId="hierarchy" qsTypeId="urn:microsoft.com/office/officeart/2005/8/quickstyle/simple1" qsCatId="simple" csTypeId="urn:microsoft.com/office/officeart/2005/8/colors/accent1_2" csCatId="accent1"/>
+      <dgm:spPr/>
+      <dgm:t>
+        <a:bodyPr/>
+        <a:lstStyle/>
+        <a:p>
+          <a:endParaRPr lang="en-US"/>
+        </a:p>
+      </dgm:t>
+    </dgm:pt>
+    <dgm:pt modelId="{1768B56F-6846-4D60-B583-16DD5EBF4A24}">
+      <dgm:prSet/>
+      <dgm:spPr/>
+      <dgm:t>
+        <a:bodyPr/>
+        <a:lstStyle/>
+        <a:p>
+          <a:r>
+            <a:rPr lang="en-US"/>
+            <a:t>Based on my analysis, I recommend that Emporium continue investing in high-performing categories such as Technology &amp; Accessories, as they generate the highest sales. I also recommend implementing targeted promotions and marketing strategies to improve sales in lower-performing categories and store locations. </a:t>
+          </a:r>
+        </a:p>
+      </dgm:t>
+    </dgm:pt>
+    <dgm:pt modelId="{F1F3A56F-D61F-4C3F-9FA9-7DBC8FA80948}" type="parTrans" cxnId="{42DB101F-6C96-4D30-B03E-D72D7B0C35A8}">
+      <dgm:prSet/>
+      <dgm:spPr/>
+      <dgm:t>
+        <a:bodyPr/>
+        <a:lstStyle/>
+        <a:p>
+          <a:endParaRPr lang="en-US"/>
+        </a:p>
+      </dgm:t>
+    </dgm:pt>
+    <dgm:pt modelId="{A0975928-B5E1-46B3-A158-9C3FDB52DD9E}" type="sibTrans" cxnId="{42DB101F-6C96-4D30-B03E-D72D7B0C35A8}">
+      <dgm:prSet/>
+      <dgm:spPr/>
+      <dgm:t>
+        <a:bodyPr/>
+        <a:lstStyle/>
+        <a:p>
+          <a:endParaRPr lang="en-US"/>
+        </a:p>
+      </dgm:t>
+    </dgm:pt>
+    <dgm:pt modelId="{2384CDBD-A9D4-471D-BB99-6FBE3BA33580}">
+      <dgm:prSet/>
+      <dgm:spPr/>
+      <dgm:t>
+        <a:bodyPr/>
+        <a:lstStyle/>
+        <a:p>
+          <a:r>
+            <a:rPr lang="en-US"/>
+            <a:t>Finally, leveraging best-selling books through featured displays and promotional campaigns can help attract more customers and increase revenue. I believe these strategies will help sustain sales growth and improve overall business performance in the next quarter.</a:t>
+          </a:r>
+        </a:p>
+      </dgm:t>
+    </dgm:pt>
+    <dgm:pt modelId="{AB1580C1-AC3B-4265-9541-EDFBE539A616}" type="parTrans" cxnId="{2829E6A4-5A33-4F9D-A948-FE152D797F4F}">
+      <dgm:prSet/>
+      <dgm:spPr/>
+      <dgm:t>
+        <a:bodyPr/>
+        <a:lstStyle/>
+        <a:p>
+          <a:endParaRPr lang="en-US"/>
+        </a:p>
+      </dgm:t>
+    </dgm:pt>
+    <dgm:pt modelId="{C1382873-B8D7-46AF-8800-85800CA4977D}" type="sibTrans" cxnId="{2829E6A4-5A33-4F9D-A948-FE152D797F4F}">
+      <dgm:prSet/>
+      <dgm:spPr/>
+      <dgm:t>
+        <a:bodyPr/>
+        <a:lstStyle/>
+        <a:p>
+          <a:endParaRPr lang="en-US"/>
+        </a:p>
+      </dgm:t>
+    </dgm:pt>
+    <dgm:pt modelId="{91C53C6C-2BD1-47C9-9821-128D7AE7A709}" type="pres">
+      <dgm:prSet presAssocID="{C04EAEB5-3713-42CF-90CA-4AC497E5F177}" presName="hierChild1" presStyleCnt="0">
+        <dgm:presLayoutVars>
+          <dgm:chPref val="1"/>
+          <dgm:dir/>
+          <dgm:animOne val="branch"/>
+          <dgm:animLvl val="lvl"/>
+          <dgm:resizeHandles/>
+        </dgm:presLayoutVars>
+      </dgm:prSet>
+      <dgm:spPr/>
+    </dgm:pt>
+    <dgm:pt modelId="{EBB2BAB0-8B39-4100-A716-02FED99FA7B4}" type="pres">
+      <dgm:prSet presAssocID="{1768B56F-6846-4D60-B583-16DD5EBF4A24}" presName="hierRoot1" presStyleCnt="0"/>
+      <dgm:spPr/>
+    </dgm:pt>
+    <dgm:pt modelId="{E307FCA1-F3C5-4450-85D8-0234E7CDC1E5}" type="pres">
+      <dgm:prSet presAssocID="{1768B56F-6846-4D60-B583-16DD5EBF4A24}" presName="composite" presStyleCnt="0"/>
+      <dgm:spPr/>
+    </dgm:pt>
+    <dgm:pt modelId="{5D0D6440-5190-4B83-8B17-EE71D348CFD5}" type="pres">
+      <dgm:prSet presAssocID="{1768B56F-6846-4D60-B583-16DD5EBF4A24}" presName="background" presStyleLbl="node0" presStyleIdx="0" presStyleCnt="2"/>
+      <dgm:spPr/>
+    </dgm:pt>
+    <dgm:pt modelId="{0D2A62D5-3617-426B-BE60-E395B34F9CD8}" type="pres">
+      <dgm:prSet presAssocID="{1768B56F-6846-4D60-B583-16DD5EBF4A24}" presName="text" presStyleLbl="fgAcc0" presStyleIdx="0" presStyleCnt="2">
+        <dgm:presLayoutVars>
+          <dgm:chPref val="3"/>
+        </dgm:presLayoutVars>
+      </dgm:prSet>
+      <dgm:spPr/>
+    </dgm:pt>
+    <dgm:pt modelId="{67B91480-40B1-4F5D-993A-02F73C432A4D}" type="pres">
+      <dgm:prSet presAssocID="{1768B56F-6846-4D60-B583-16DD5EBF4A24}" presName="hierChild2" presStyleCnt="0"/>
+      <dgm:spPr/>
+    </dgm:pt>
+    <dgm:pt modelId="{D97B20DE-D6F9-4509-841B-7227034E8EBE}" type="pres">
+      <dgm:prSet presAssocID="{2384CDBD-A9D4-471D-BB99-6FBE3BA33580}" presName="hierRoot1" presStyleCnt="0"/>
+      <dgm:spPr/>
+    </dgm:pt>
+    <dgm:pt modelId="{41EB88C6-28E4-4EEA-B650-B8040B770E34}" type="pres">
+      <dgm:prSet presAssocID="{2384CDBD-A9D4-471D-BB99-6FBE3BA33580}" presName="composite" presStyleCnt="0"/>
+      <dgm:spPr/>
+    </dgm:pt>
+    <dgm:pt modelId="{B01E93EB-8CA9-425D-8A66-0B58A41D0858}" type="pres">
+      <dgm:prSet presAssocID="{2384CDBD-A9D4-471D-BB99-6FBE3BA33580}" presName="background" presStyleLbl="node0" presStyleIdx="1" presStyleCnt="2"/>
+      <dgm:spPr/>
+    </dgm:pt>
+    <dgm:pt modelId="{915F0ACC-C788-4191-AA9C-9CDB89AE1E1E}" type="pres">
+      <dgm:prSet presAssocID="{2384CDBD-A9D4-471D-BB99-6FBE3BA33580}" presName="text" presStyleLbl="fgAcc0" presStyleIdx="1" presStyleCnt="2">
+        <dgm:presLayoutVars>
+          <dgm:chPref val="3"/>
+        </dgm:presLayoutVars>
+      </dgm:prSet>
+      <dgm:spPr/>
+    </dgm:pt>
+    <dgm:pt modelId="{BA14AFC0-DC55-4CF0-BB93-0A950E021A61}" type="pres">
+      <dgm:prSet presAssocID="{2384CDBD-A9D4-471D-BB99-6FBE3BA33580}" presName="hierChild2" presStyleCnt="0"/>
+      <dgm:spPr/>
+    </dgm:pt>
+  </dgm:ptLst>
+  <dgm:cxnLst>
+    <dgm:cxn modelId="{42DB101F-6C96-4D30-B03E-D72D7B0C35A8}" srcId="{C04EAEB5-3713-42CF-90CA-4AC497E5F177}" destId="{1768B56F-6846-4D60-B583-16DD5EBF4A24}" srcOrd="0" destOrd="0" parTransId="{F1F3A56F-D61F-4C3F-9FA9-7DBC8FA80948}" sibTransId="{A0975928-B5E1-46B3-A158-9C3FDB52DD9E}"/>
+    <dgm:cxn modelId="{C8477B27-CFCC-456E-A273-AC38D3583909}" type="presOf" srcId="{2384CDBD-A9D4-471D-BB99-6FBE3BA33580}" destId="{915F0ACC-C788-4191-AA9C-9CDB89AE1E1E}" srcOrd="0" destOrd="0" presId="urn:microsoft.com/office/officeart/2005/8/layout/hierarchy1"/>
+    <dgm:cxn modelId="{CA7DBD53-0542-4623-B0B3-4AEA3760C878}" type="presOf" srcId="{1768B56F-6846-4D60-B583-16DD5EBF4A24}" destId="{0D2A62D5-3617-426B-BE60-E395B34F9CD8}" srcOrd="0" destOrd="0" presId="urn:microsoft.com/office/officeart/2005/8/layout/hierarchy1"/>
+    <dgm:cxn modelId="{FEA58F9F-7C7D-412A-9B52-1BAFE5C15903}" type="presOf" srcId="{C04EAEB5-3713-42CF-90CA-4AC497E5F177}" destId="{91C53C6C-2BD1-47C9-9821-128D7AE7A709}" srcOrd="0" destOrd="0" presId="urn:microsoft.com/office/officeart/2005/8/layout/hierarchy1"/>
+    <dgm:cxn modelId="{2829E6A4-5A33-4F9D-A948-FE152D797F4F}" srcId="{C04EAEB5-3713-42CF-90CA-4AC497E5F177}" destId="{2384CDBD-A9D4-471D-BB99-6FBE3BA33580}" srcOrd="1" destOrd="0" parTransId="{AB1580C1-AC3B-4265-9541-EDFBE539A616}" sibTransId="{C1382873-B8D7-46AF-8800-85800CA4977D}"/>
+    <dgm:cxn modelId="{6EB95258-498E-4D5A-A4A3-E12FDD61CE8A}" type="presParOf" srcId="{91C53C6C-2BD1-47C9-9821-128D7AE7A709}" destId="{EBB2BAB0-8B39-4100-A716-02FED99FA7B4}" srcOrd="0" destOrd="0" presId="urn:microsoft.com/office/officeart/2005/8/layout/hierarchy1"/>
+    <dgm:cxn modelId="{6F6ECBCC-7522-45E4-A8BA-465446C3C07D}" type="presParOf" srcId="{EBB2BAB0-8B39-4100-A716-02FED99FA7B4}" destId="{E307FCA1-F3C5-4450-85D8-0234E7CDC1E5}" srcOrd="0" destOrd="0" presId="urn:microsoft.com/office/officeart/2005/8/layout/hierarchy1"/>
+    <dgm:cxn modelId="{97E4049F-5A24-4746-A460-4CA00D1553A8}" type="presParOf" srcId="{E307FCA1-F3C5-4450-85D8-0234E7CDC1E5}" destId="{5D0D6440-5190-4B83-8B17-EE71D348CFD5}" srcOrd="0" destOrd="0" presId="urn:microsoft.com/office/officeart/2005/8/layout/hierarchy1"/>
+    <dgm:cxn modelId="{1F199AF8-60B6-4869-88A8-77289E8B958A}" type="presParOf" srcId="{E307FCA1-F3C5-4450-85D8-0234E7CDC1E5}" destId="{0D2A62D5-3617-426B-BE60-E395B34F9CD8}" srcOrd="1" destOrd="0" presId="urn:microsoft.com/office/officeart/2005/8/layout/hierarchy1"/>
+    <dgm:cxn modelId="{85AA3F14-0087-4663-A5CB-40834B384D62}" type="presParOf" srcId="{EBB2BAB0-8B39-4100-A716-02FED99FA7B4}" destId="{67B91480-40B1-4F5D-993A-02F73C432A4D}" srcOrd="1" destOrd="0" presId="urn:microsoft.com/office/officeart/2005/8/layout/hierarchy1"/>
+    <dgm:cxn modelId="{634F303A-DB52-4CEE-BFE9-182F305386DC}" type="presParOf" srcId="{91C53C6C-2BD1-47C9-9821-128D7AE7A709}" destId="{D97B20DE-D6F9-4509-841B-7227034E8EBE}" srcOrd="1" destOrd="0" presId="urn:microsoft.com/office/officeart/2005/8/layout/hierarchy1"/>
+    <dgm:cxn modelId="{E01CD3AC-F62C-4B08-BF44-56EFBD7A77E3}" type="presParOf" srcId="{D97B20DE-D6F9-4509-841B-7227034E8EBE}" destId="{41EB88C6-28E4-4EEA-B650-B8040B770E34}" srcOrd="0" destOrd="0" presId="urn:microsoft.com/office/officeart/2005/8/layout/hierarchy1"/>
+    <dgm:cxn modelId="{7EB38FB9-DABF-49D3-A311-D24B84B32A94}" type="presParOf" srcId="{41EB88C6-28E4-4EEA-B650-B8040B770E34}" destId="{B01E93EB-8CA9-425D-8A66-0B58A41D0858}" srcOrd="0" destOrd="0" presId="urn:microsoft.com/office/officeart/2005/8/layout/hierarchy1"/>
+    <dgm:cxn modelId="{781AE58C-BB25-4D22-BE8C-0CB7B8EC1022}" type="presParOf" srcId="{41EB88C6-28E4-4EEA-B650-B8040B770E34}" destId="{915F0ACC-C788-4191-AA9C-9CDB89AE1E1E}" srcOrd="1" destOrd="0" presId="urn:microsoft.com/office/officeart/2005/8/layout/hierarchy1"/>
+    <dgm:cxn modelId="{A24CC8AE-6BB0-4EA1-AFDD-17C030BD5EF8}" type="presParOf" srcId="{D97B20DE-D6F9-4509-841B-7227034E8EBE}" destId="{BA14AFC0-DC55-4CF0-BB93-0A950E021A61}" srcOrd="1" destOrd="0" presId="urn:microsoft.com/office/officeart/2005/8/layout/hierarchy1"/>
+  </dgm:cxnLst>
+  <dgm:bg/>
+  <dgm:whole/>
+  <dgm:extLst>
+    <a:ext uri="http://schemas.microsoft.com/office/drawing/2008/diagram">
+      <dsp:dataModelExt xmlns:dsp="http://schemas.microsoft.com/office/drawing/2008/diagram" relId="rId6" minVer="http://schemas.openxmlformats.org/drawingml/2006/diagram"/>
+    </a:ext>
+  </dgm:extLst>
+</dgm:dataModel>
+</file>
+
+<file path=ppt/diagrams/data2.xml><?xml version="1.0" encoding="utf-8"?>
 <dgm:dataModel xmlns:dgm="http://schemas.openxmlformats.org/drawingml/2006/diagram" xmlns:a="http://schemas.openxmlformats.org/drawingml/2006/main">
   <dgm:ptLst>
     <dgm:pt modelId="{DB85BCC3-4ED0-4CD3-963F-FE9E57C8B75C}" type="doc">
@@ -1304,6 +2130,280 @@
 </file>
 
 <file path=ppt/diagrams/drawing1.xml><?xml version="1.0" encoding="utf-8"?>
+<dsp:drawing xmlns:dgm="http://schemas.openxmlformats.org/drawingml/2006/diagram" xmlns:dsp="http://schemas.microsoft.com/office/drawing/2008/diagram" xmlns:a="http://schemas.openxmlformats.org/drawingml/2006/main">
+  <dsp:spTree>
+    <dsp:nvGrpSpPr>
+      <dsp:cNvPr id="0" name=""/>
+      <dsp:cNvGrpSpPr/>
+    </dsp:nvGrpSpPr>
+    <dsp:grpSpPr/>
+    <dsp:sp modelId="{5D0D6440-5190-4B83-8B17-EE71D348CFD5}">
+      <dsp:nvSpPr>
+        <dsp:cNvPr id="0" name=""/>
+        <dsp:cNvSpPr/>
+      </dsp:nvSpPr>
+      <dsp:spPr>
+        <a:xfrm>
+          <a:off x="1261" y="393494"/>
+          <a:ext cx="4428354" cy="2812004"/>
+        </a:xfrm>
+        <a:prstGeom prst="roundRect">
+          <a:avLst>
+            <a:gd name="adj" fmla="val 10000"/>
+          </a:avLst>
+        </a:prstGeom>
+        <a:solidFill>
+          <a:schemeClr val="accent1">
+            <a:hueOff val="0"/>
+            <a:satOff val="0"/>
+            <a:lumOff val="0"/>
+            <a:alphaOff val="0"/>
+          </a:schemeClr>
+        </a:solidFill>
+        <a:ln w="12700" cap="flat" cmpd="sng" algn="ctr">
+          <a:solidFill>
+            <a:schemeClr val="lt1">
+              <a:hueOff val="0"/>
+              <a:satOff val="0"/>
+              <a:lumOff val="0"/>
+              <a:alphaOff val="0"/>
+            </a:schemeClr>
+          </a:solidFill>
+          <a:prstDash val="solid"/>
+          <a:miter lim="800000"/>
+        </a:ln>
+        <a:effectLst/>
+      </dsp:spPr>
+      <dsp:style>
+        <a:lnRef idx="2">
+          <a:scrgbClr r="0" g="0" b="0"/>
+        </a:lnRef>
+        <a:fillRef idx="1">
+          <a:scrgbClr r="0" g="0" b="0"/>
+        </a:fillRef>
+        <a:effectRef idx="0">
+          <a:scrgbClr r="0" g="0" b="0"/>
+        </a:effectRef>
+        <a:fontRef idx="minor">
+          <a:schemeClr val="lt1"/>
+        </a:fontRef>
+      </dsp:style>
+    </dsp:sp>
+    <dsp:sp modelId="{0D2A62D5-3617-426B-BE60-E395B34F9CD8}">
+      <dsp:nvSpPr>
+        <dsp:cNvPr id="0" name=""/>
+        <dsp:cNvSpPr/>
+      </dsp:nvSpPr>
+      <dsp:spPr>
+        <a:xfrm>
+          <a:off x="493301" y="860931"/>
+          <a:ext cx="4428354" cy="2812004"/>
+        </a:xfrm>
+        <a:prstGeom prst="roundRect">
+          <a:avLst>
+            <a:gd name="adj" fmla="val 10000"/>
+          </a:avLst>
+        </a:prstGeom>
+        <a:solidFill>
+          <a:schemeClr val="lt1">
+            <a:alpha val="90000"/>
+            <a:hueOff val="0"/>
+            <a:satOff val="0"/>
+            <a:lumOff val="0"/>
+            <a:alphaOff val="0"/>
+          </a:schemeClr>
+        </a:solidFill>
+        <a:ln w="12700" cap="flat" cmpd="sng" algn="ctr">
+          <a:solidFill>
+            <a:schemeClr val="accent1">
+              <a:hueOff val="0"/>
+              <a:satOff val="0"/>
+              <a:lumOff val="0"/>
+              <a:alphaOff val="0"/>
+            </a:schemeClr>
+          </a:solidFill>
+          <a:prstDash val="solid"/>
+          <a:miter lim="800000"/>
+        </a:ln>
+        <a:effectLst/>
+      </dsp:spPr>
+      <dsp:style>
+        <a:lnRef idx="2">
+          <a:scrgbClr r="0" g="0" b="0"/>
+        </a:lnRef>
+        <a:fillRef idx="1">
+          <a:scrgbClr r="0" g="0" b="0"/>
+        </a:fillRef>
+        <a:effectRef idx="0">
+          <a:scrgbClr r="0" g="0" b="0"/>
+        </a:effectRef>
+        <a:fontRef idx="minor"/>
+      </dsp:style>
+      <dsp:txBody>
+        <a:bodyPr spcFirstLastPara="0" vert="horz" wrap="square" lIns="68580" tIns="68580" rIns="68580" bIns="68580" numCol="1" spcCol="1270" anchor="ctr" anchorCtr="0">
+          <a:noAutofit/>
+        </a:bodyPr>
+        <a:lstStyle/>
+        <a:p>
+          <a:pPr marL="0" lvl="0" indent="0" algn="ctr" defTabSz="800100">
+            <a:lnSpc>
+              <a:spcPct val="90000"/>
+            </a:lnSpc>
+            <a:spcBef>
+              <a:spcPct val="0"/>
+            </a:spcBef>
+            <a:spcAft>
+              <a:spcPct val="35000"/>
+            </a:spcAft>
+            <a:buNone/>
+          </a:pPr>
+          <a:r>
+            <a:rPr lang="en-US" sz="1800" kern="1200"/>
+            <a:t>Based on my analysis, I recommend that Emporium continue investing in high-performing categories such as Technology &amp; Accessories, as they generate the highest sales. I also recommend implementing targeted promotions and marketing strategies to improve sales in lower-performing categories and store locations. </a:t>
+          </a:r>
+        </a:p>
+      </dsp:txBody>
+      <dsp:txXfrm>
+        <a:off x="575662" y="943292"/>
+        <a:ext cx="4263632" cy="2647282"/>
+      </dsp:txXfrm>
+    </dsp:sp>
+    <dsp:sp modelId="{B01E93EB-8CA9-425D-8A66-0B58A41D0858}">
+      <dsp:nvSpPr>
+        <dsp:cNvPr id="0" name=""/>
+        <dsp:cNvSpPr/>
+      </dsp:nvSpPr>
+      <dsp:spPr>
+        <a:xfrm>
+          <a:off x="5413694" y="393494"/>
+          <a:ext cx="4428354" cy="2812004"/>
+        </a:xfrm>
+        <a:prstGeom prst="roundRect">
+          <a:avLst>
+            <a:gd name="adj" fmla="val 10000"/>
+          </a:avLst>
+        </a:prstGeom>
+        <a:solidFill>
+          <a:schemeClr val="accent1">
+            <a:hueOff val="0"/>
+            <a:satOff val="0"/>
+            <a:lumOff val="0"/>
+            <a:alphaOff val="0"/>
+          </a:schemeClr>
+        </a:solidFill>
+        <a:ln w="12700" cap="flat" cmpd="sng" algn="ctr">
+          <a:solidFill>
+            <a:schemeClr val="lt1">
+              <a:hueOff val="0"/>
+              <a:satOff val="0"/>
+              <a:lumOff val="0"/>
+              <a:alphaOff val="0"/>
+            </a:schemeClr>
+          </a:solidFill>
+          <a:prstDash val="solid"/>
+          <a:miter lim="800000"/>
+        </a:ln>
+        <a:effectLst/>
+      </dsp:spPr>
+      <dsp:style>
+        <a:lnRef idx="2">
+          <a:scrgbClr r="0" g="0" b="0"/>
+        </a:lnRef>
+        <a:fillRef idx="1">
+          <a:scrgbClr r="0" g="0" b="0"/>
+        </a:fillRef>
+        <a:effectRef idx="0">
+          <a:scrgbClr r="0" g="0" b="0"/>
+        </a:effectRef>
+        <a:fontRef idx="minor">
+          <a:schemeClr val="lt1"/>
+        </a:fontRef>
+      </dsp:style>
+    </dsp:sp>
+    <dsp:sp modelId="{915F0ACC-C788-4191-AA9C-9CDB89AE1E1E}">
+      <dsp:nvSpPr>
+        <dsp:cNvPr id="0" name=""/>
+        <dsp:cNvSpPr/>
+      </dsp:nvSpPr>
+      <dsp:spPr>
+        <a:xfrm>
+          <a:off x="5905734" y="860931"/>
+          <a:ext cx="4428354" cy="2812004"/>
+        </a:xfrm>
+        <a:prstGeom prst="roundRect">
+          <a:avLst>
+            <a:gd name="adj" fmla="val 10000"/>
+          </a:avLst>
+        </a:prstGeom>
+        <a:solidFill>
+          <a:schemeClr val="lt1">
+            <a:alpha val="90000"/>
+            <a:hueOff val="0"/>
+            <a:satOff val="0"/>
+            <a:lumOff val="0"/>
+            <a:alphaOff val="0"/>
+          </a:schemeClr>
+        </a:solidFill>
+        <a:ln w="12700" cap="flat" cmpd="sng" algn="ctr">
+          <a:solidFill>
+            <a:schemeClr val="accent1">
+              <a:hueOff val="0"/>
+              <a:satOff val="0"/>
+              <a:lumOff val="0"/>
+              <a:alphaOff val="0"/>
+            </a:schemeClr>
+          </a:solidFill>
+          <a:prstDash val="solid"/>
+          <a:miter lim="800000"/>
+        </a:ln>
+        <a:effectLst/>
+      </dsp:spPr>
+      <dsp:style>
+        <a:lnRef idx="2">
+          <a:scrgbClr r="0" g="0" b="0"/>
+        </a:lnRef>
+        <a:fillRef idx="1">
+          <a:scrgbClr r="0" g="0" b="0"/>
+        </a:fillRef>
+        <a:effectRef idx="0">
+          <a:scrgbClr r="0" g="0" b="0"/>
+        </a:effectRef>
+        <a:fontRef idx="minor"/>
+      </dsp:style>
+      <dsp:txBody>
+        <a:bodyPr spcFirstLastPara="0" vert="horz" wrap="square" lIns="68580" tIns="68580" rIns="68580" bIns="68580" numCol="1" spcCol="1270" anchor="ctr" anchorCtr="0">
+          <a:noAutofit/>
+        </a:bodyPr>
+        <a:lstStyle/>
+        <a:p>
+          <a:pPr marL="0" lvl="0" indent="0" algn="ctr" defTabSz="800100">
+            <a:lnSpc>
+              <a:spcPct val="90000"/>
+            </a:lnSpc>
+            <a:spcBef>
+              <a:spcPct val="0"/>
+            </a:spcBef>
+            <a:spcAft>
+              <a:spcPct val="35000"/>
+            </a:spcAft>
+            <a:buNone/>
+          </a:pPr>
+          <a:r>
+            <a:rPr lang="en-US" sz="1800" kern="1200"/>
+            <a:t>Finally, leveraging best-selling books through featured displays and promotional campaigns can help attract more customers and increase revenue. I believe these strategies will help sustain sales growth and improve overall business performance in the next quarter.</a:t>
+          </a:r>
+        </a:p>
+      </dsp:txBody>
+      <dsp:txXfrm>
+        <a:off x="5988095" y="943292"/>
+        <a:ext cx="4263632" cy="2647282"/>
+      </dsp:txXfrm>
+    </dsp:sp>
+  </dsp:spTree>
+</dsp:drawing>
+</file>
+
+<file path=ppt/diagrams/drawing2.xml><?xml version="1.0" encoding="utf-8"?>
 <dsp:drawing xmlns:dgm="http://schemas.openxmlformats.org/drawingml/2006/diagram" xmlns:dsp="http://schemas.microsoft.com/office/drawing/2008/diagram" xmlns:a="http://schemas.openxmlformats.org/drawingml/2006/main">
   <dsp:spTree>
     <dsp:nvGrpSpPr>
@@ -1796,6 +2896,569 @@
 </file>
 
 <file path=ppt/diagrams/layout1.xml><?xml version="1.0" encoding="utf-8"?>
+<dgm:layoutDef xmlns:dgm="http://schemas.openxmlformats.org/drawingml/2006/diagram" xmlns:a="http://schemas.openxmlformats.org/drawingml/2006/main" uniqueId="urn:microsoft.com/office/officeart/2005/8/layout/hierarchy1">
+  <dgm:title val=""/>
+  <dgm:desc val=""/>
+  <dgm:catLst>
+    <dgm:cat type="hierarchy" pri="2000"/>
+  </dgm:catLst>
+  <dgm:sampData>
+    <dgm:dataModel>
+      <dgm:ptLst>
+        <dgm:pt modelId="0" type="doc"/>
+        <dgm:pt modelId="1">
+          <dgm:prSet phldr="1"/>
+        </dgm:pt>
+        <dgm:pt modelId="2">
+          <dgm:prSet phldr="1"/>
+        </dgm:pt>
+        <dgm:pt modelId="21">
+          <dgm:prSet phldr="1"/>
+        </dgm:pt>
+        <dgm:pt modelId="22">
+          <dgm:prSet phldr="1"/>
+        </dgm:pt>
+        <dgm:pt modelId="3">
+          <dgm:prSet phldr="1"/>
+        </dgm:pt>
+        <dgm:pt modelId="31">
+          <dgm:prSet phldr="1"/>
+        </dgm:pt>
+      </dgm:ptLst>
+      <dgm:cxnLst>
+        <dgm:cxn modelId="4" srcId="0" destId="1" srcOrd="0" destOrd="0"/>
+        <dgm:cxn modelId="5" srcId="1" destId="2" srcOrd="0" destOrd="0"/>
+        <dgm:cxn modelId="6" srcId="1" destId="3" srcOrd="1" destOrd="0"/>
+        <dgm:cxn modelId="23" srcId="2" destId="21" srcOrd="0" destOrd="0"/>
+        <dgm:cxn modelId="24" srcId="2" destId="22" srcOrd="1" destOrd="0"/>
+        <dgm:cxn modelId="33" srcId="3" destId="31" srcOrd="0" destOrd="0"/>
+      </dgm:cxnLst>
+      <dgm:bg/>
+      <dgm:whole/>
+    </dgm:dataModel>
+  </dgm:sampData>
+  <dgm:styleData>
+    <dgm:dataModel>
+      <dgm:ptLst>
+        <dgm:pt modelId="0" type="doc"/>
+        <dgm:pt modelId="1"/>
+        <dgm:pt modelId="11"/>
+        <dgm:pt modelId="12"/>
+      </dgm:ptLst>
+      <dgm:cxnLst>
+        <dgm:cxn modelId="2" srcId="0" destId="1" srcOrd="0" destOrd="0"/>
+        <dgm:cxn modelId="13" srcId="1" destId="11" srcOrd="0" destOrd="0"/>
+        <dgm:cxn modelId="14" srcId="1" destId="12" srcOrd="1" destOrd="0"/>
+      </dgm:cxnLst>
+      <dgm:bg/>
+      <dgm:whole/>
+    </dgm:dataModel>
+  </dgm:styleData>
+  <dgm:clrData>
+    <dgm:dataModel>
+      <dgm:ptLst>
+        <dgm:pt modelId="0" type="doc"/>
+        <dgm:pt modelId="1"/>
+        <dgm:pt modelId="2"/>
+        <dgm:pt modelId="21"/>
+        <dgm:pt modelId="211"/>
+        <dgm:pt modelId="3"/>
+        <dgm:pt modelId="31"/>
+        <dgm:pt modelId="311"/>
+      </dgm:ptLst>
+      <dgm:cxnLst>
+        <dgm:cxn modelId="4" srcId="0" destId="1" srcOrd="0" destOrd="0"/>
+        <dgm:cxn modelId="5" srcId="1" destId="2" srcOrd="0" destOrd="0"/>
+        <dgm:cxn modelId="6" srcId="1" destId="3" srcOrd="1" destOrd="0"/>
+        <dgm:cxn modelId="23" srcId="2" destId="21" srcOrd="0" destOrd="0"/>
+        <dgm:cxn modelId="24" srcId="21" destId="211" srcOrd="0" destOrd="0"/>
+        <dgm:cxn modelId="33" srcId="3" destId="31" srcOrd="0" destOrd="0"/>
+        <dgm:cxn modelId="34" srcId="31" destId="311" srcOrd="0" destOrd="0"/>
+      </dgm:cxnLst>
+      <dgm:bg/>
+      <dgm:whole/>
+    </dgm:dataModel>
+  </dgm:clrData>
+  <dgm:layoutNode name="hierChild1">
+    <dgm:varLst>
+      <dgm:chPref val="1"/>
+      <dgm:dir/>
+      <dgm:animOne val="branch"/>
+      <dgm:animLvl val="lvl"/>
+      <dgm:resizeHandles/>
+    </dgm:varLst>
+    <dgm:choose name="Name0">
+      <dgm:if name="Name1" func="var" arg="dir" op="equ" val="norm">
+        <dgm:alg type="hierChild">
+          <dgm:param type="linDir" val="fromL"/>
+        </dgm:alg>
+      </dgm:if>
+      <dgm:else name="Name2">
+        <dgm:alg type="hierChild">
+          <dgm:param type="linDir" val="fromR"/>
+        </dgm:alg>
+      </dgm:else>
+    </dgm:choose>
+    <dgm:shape xmlns:r="http://schemas.openxmlformats.org/officeDocument/2006/relationships" r:blip="">
+      <dgm:adjLst/>
+    </dgm:shape>
+    <dgm:presOf/>
+    <dgm:constrLst>
+      <dgm:constr type="primFontSz" for="des" ptType="node" op="equ" val="65"/>
+      <dgm:constr type="w" for="des" forName="composite" refType="w"/>
+      <dgm:constr type="h" for="des" forName="composite" refType="w" refFor="des" refForName="composite" fact="0.667"/>
+      <dgm:constr type="w" for="des" forName="composite2" refType="w" refFor="des" refForName="composite"/>
+      <dgm:constr type="h" for="des" forName="composite2" refType="h" refFor="des" refForName="composite"/>
+      <dgm:constr type="w" for="des" forName="composite3" refType="w" refFor="des" refForName="composite"/>
+      <dgm:constr type="h" for="des" forName="composite3" refType="h" refFor="des" refForName="composite"/>
+      <dgm:constr type="w" for="des" forName="composite4" refType="w" refFor="des" refForName="composite"/>
+      <dgm:constr type="h" for="des" forName="composite4" refType="h" refFor="des" refForName="composite"/>
+      <dgm:constr type="w" for="des" forName="composite5" refType="w" refFor="des" refForName="composite"/>
+      <dgm:constr type="h" for="des" forName="composite5" refType="h" refFor="des" refForName="composite"/>
+      <dgm:constr type="sibSp" refType="w" refFor="des" refForName="composite" fact="0.1"/>
+      <dgm:constr type="sibSp" for="des" forName="hierChild2" refType="sibSp"/>
+      <dgm:constr type="sibSp" for="des" forName="hierChild3" refType="sibSp"/>
+      <dgm:constr type="sibSp" for="des" forName="hierChild4" refType="sibSp"/>
+      <dgm:constr type="sibSp" for="des" forName="hierChild5" refType="sibSp"/>
+      <dgm:constr type="sibSp" for="des" forName="hierChild6" refType="sibSp"/>
+      <dgm:constr type="sp" for="des" forName="hierRoot1" refType="h" refFor="des" refForName="composite" fact="0.25"/>
+      <dgm:constr type="sp" for="des" forName="hierRoot2" refType="sp" refFor="des" refForName="hierRoot1"/>
+      <dgm:constr type="sp" for="des" forName="hierRoot3" refType="sp" refFor="des" refForName="hierRoot1"/>
+      <dgm:constr type="sp" for="des" forName="hierRoot4" refType="sp" refFor="des" refForName="hierRoot1"/>
+      <dgm:constr type="sp" for="des" forName="hierRoot5" refType="sp" refFor="des" refForName="hierRoot1"/>
+    </dgm:constrLst>
+    <dgm:ruleLst/>
+    <dgm:forEach name="Name3" axis="ch">
+      <dgm:forEach name="Name4" axis="self" ptType="node">
+        <dgm:layoutNode name="hierRoot1">
+          <dgm:alg type="hierRoot"/>
+          <dgm:shape xmlns:r="http://schemas.openxmlformats.org/officeDocument/2006/relationships" r:blip="">
+            <dgm:adjLst/>
+          </dgm:shape>
+          <dgm:presOf/>
+          <dgm:constrLst>
+            <dgm:constr type="bendDist" for="des" ptType="parTrans" refType="sp" fact="0.5"/>
+          </dgm:constrLst>
+          <dgm:ruleLst/>
+          <dgm:layoutNode name="composite">
+            <dgm:alg type="composite"/>
+            <dgm:shape xmlns:r="http://schemas.openxmlformats.org/officeDocument/2006/relationships" r:blip="">
+              <dgm:adjLst/>
+            </dgm:shape>
+            <dgm:presOf/>
+            <dgm:constrLst>
+              <dgm:constr type="w" for="ch" forName="background" refType="w" fact="0.9"/>
+              <dgm:constr type="h" for="ch" forName="background" refType="w" refFor="ch" refForName="background" fact="0.635"/>
+              <dgm:constr type="t" for="ch" forName="background"/>
+              <dgm:constr type="l" for="ch" forName="background"/>
+              <dgm:constr type="w" for="ch" forName="text" refType="w" fact="0.9"/>
+              <dgm:constr type="h" for="ch" forName="text" refType="w" refFor="ch" refForName="text" fact="0.635"/>
+              <dgm:constr type="t" for="ch" forName="text" refType="w" fact="0.095"/>
+              <dgm:constr type="l" for="ch" forName="text" refType="w" fact="0.1"/>
+            </dgm:constrLst>
+            <dgm:ruleLst/>
+            <dgm:layoutNode name="background" styleLbl="node0" moveWith="text">
+              <dgm:alg type="sp"/>
+              <dgm:shape xmlns:r="http://schemas.openxmlformats.org/officeDocument/2006/relationships" type="roundRect" r:blip="">
+                <dgm:adjLst>
+                  <dgm:adj idx="1" val="0.1"/>
+                </dgm:adjLst>
+              </dgm:shape>
+              <dgm:presOf/>
+              <dgm:constrLst/>
+              <dgm:ruleLst/>
+            </dgm:layoutNode>
+            <dgm:layoutNode name="text" styleLbl="fgAcc0">
+              <dgm:varLst>
+                <dgm:chPref val="3"/>
+              </dgm:varLst>
+              <dgm:alg type="tx"/>
+              <dgm:shape xmlns:r="http://schemas.openxmlformats.org/officeDocument/2006/relationships" type="roundRect" r:blip="">
+                <dgm:adjLst>
+                  <dgm:adj idx="1" val="0.1"/>
+                </dgm:adjLst>
+              </dgm:shape>
+              <dgm:presOf axis="self"/>
+              <dgm:constrLst>
+                <dgm:constr type="tMarg" refType="primFontSz" fact="0.3"/>
+                <dgm:constr type="bMarg" refType="primFontSz" fact="0.3"/>
+                <dgm:constr type="lMarg" refType="primFontSz" fact="0.3"/>
+                <dgm:constr type="rMarg" refType="primFontSz" fact="0.3"/>
+              </dgm:constrLst>
+              <dgm:ruleLst>
+                <dgm:rule type="primFontSz" val="5" fact="NaN" max="NaN"/>
+              </dgm:ruleLst>
+            </dgm:layoutNode>
+          </dgm:layoutNode>
+          <dgm:layoutNode name="hierChild2">
+            <dgm:choose name="Name5">
+              <dgm:if name="Name6" func="var" arg="dir" op="equ" val="norm">
+                <dgm:alg type="hierChild">
+                  <dgm:param type="linDir" val="fromL"/>
+                </dgm:alg>
+              </dgm:if>
+              <dgm:else name="Name7">
+                <dgm:alg type="hierChild">
+                  <dgm:param type="linDir" val="fromR"/>
+                </dgm:alg>
+              </dgm:else>
+            </dgm:choose>
+            <dgm:shape xmlns:r="http://schemas.openxmlformats.org/officeDocument/2006/relationships" r:blip="">
+              <dgm:adjLst/>
+            </dgm:shape>
+            <dgm:presOf/>
+            <dgm:constrLst/>
+            <dgm:ruleLst/>
+            <dgm:forEach name="Name8" axis="ch">
+              <dgm:forEach name="Name9" axis="self" ptType="parTrans" cnt="1">
+                <dgm:layoutNode name="Name10">
+                  <dgm:alg type="conn">
+                    <dgm:param type="dim" val="1D"/>
+                    <dgm:param type="endSty" val="noArr"/>
+                    <dgm:param type="connRout" val="bend"/>
+                    <dgm:param type="bendPt" val="end"/>
+                    <dgm:param type="begPts" val="bCtr"/>
+                    <dgm:param type="endPts" val="tCtr"/>
+                    <dgm:param type="srcNode" val="background"/>
+                    <dgm:param type="dstNode" val="background2"/>
+                  </dgm:alg>
+                  <dgm:shape xmlns:r="http://schemas.openxmlformats.org/officeDocument/2006/relationships" type="conn" r:blip="" zOrderOff="-999">
+                    <dgm:adjLst/>
+                  </dgm:shape>
+                  <dgm:presOf axis="self"/>
+                  <dgm:constrLst>
+                    <dgm:constr type="begPad"/>
+                    <dgm:constr type="endPad"/>
+                  </dgm:constrLst>
+                  <dgm:ruleLst/>
+                </dgm:layoutNode>
+              </dgm:forEach>
+              <dgm:forEach name="Name11" axis="self" ptType="node">
+                <dgm:layoutNode name="hierRoot2">
+                  <dgm:alg type="hierRoot"/>
+                  <dgm:shape xmlns:r="http://schemas.openxmlformats.org/officeDocument/2006/relationships" r:blip="">
+                    <dgm:adjLst/>
+                  </dgm:shape>
+                  <dgm:presOf/>
+                  <dgm:constrLst>
+                    <dgm:constr type="bendDist" for="des" ptType="parTrans" refType="sp" fact="0.5"/>
+                  </dgm:constrLst>
+                  <dgm:ruleLst/>
+                  <dgm:layoutNode name="composite2">
+                    <dgm:alg type="composite"/>
+                    <dgm:shape xmlns:r="http://schemas.openxmlformats.org/officeDocument/2006/relationships" r:blip="">
+                      <dgm:adjLst/>
+                    </dgm:shape>
+                    <dgm:presOf/>
+                    <dgm:constrLst>
+                      <dgm:constr type="w" for="ch" forName="background2" refType="w" fact="0.9"/>
+                      <dgm:constr type="h" for="ch" forName="background2" refType="w" refFor="ch" refForName="background2" fact="0.635"/>
+                      <dgm:constr type="t" for="ch" forName="background2"/>
+                      <dgm:constr type="l" for="ch" forName="background2"/>
+                      <dgm:constr type="w" for="ch" forName="text2" refType="w" fact="0.9"/>
+                      <dgm:constr type="h" for="ch" forName="text2" refType="w" refFor="ch" refForName="text2" fact="0.635"/>
+                      <dgm:constr type="t" for="ch" forName="text2" refType="w" fact="0.095"/>
+                      <dgm:constr type="l" for="ch" forName="text2" refType="w" fact="0.1"/>
+                    </dgm:constrLst>
+                    <dgm:ruleLst/>
+                    <dgm:layoutNode name="background2" moveWith="text2">
+                      <dgm:alg type="sp"/>
+                      <dgm:shape xmlns:r="http://schemas.openxmlformats.org/officeDocument/2006/relationships" type="roundRect" r:blip="">
+                        <dgm:adjLst>
+                          <dgm:adj idx="1" val="0.1"/>
+                        </dgm:adjLst>
+                      </dgm:shape>
+                      <dgm:presOf/>
+                      <dgm:constrLst/>
+                      <dgm:ruleLst/>
+                    </dgm:layoutNode>
+                    <dgm:layoutNode name="text2" styleLbl="fgAcc2">
+                      <dgm:varLst>
+                        <dgm:chPref val="3"/>
+                      </dgm:varLst>
+                      <dgm:alg type="tx"/>
+                      <dgm:shape xmlns:r="http://schemas.openxmlformats.org/officeDocument/2006/relationships" type="roundRect" r:blip="">
+                        <dgm:adjLst>
+                          <dgm:adj idx="1" val="0.1"/>
+                        </dgm:adjLst>
+                      </dgm:shape>
+                      <dgm:presOf axis="self"/>
+                      <dgm:constrLst>
+                        <dgm:constr type="tMarg" refType="primFontSz" fact="0.3"/>
+                        <dgm:constr type="bMarg" refType="primFontSz" fact="0.3"/>
+                        <dgm:constr type="lMarg" refType="primFontSz" fact="0.3"/>
+                        <dgm:constr type="rMarg" refType="primFontSz" fact="0.3"/>
+                      </dgm:constrLst>
+                      <dgm:ruleLst>
+                        <dgm:rule type="primFontSz" val="5" fact="NaN" max="NaN"/>
+                      </dgm:ruleLst>
+                    </dgm:layoutNode>
+                  </dgm:layoutNode>
+                  <dgm:layoutNode name="hierChild3">
+                    <dgm:choose name="Name12">
+                      <dgm:if name="Name13" func="var" arg="dir" op="equ" val="norm">
+                        <dgm:alg type="hierChild">
+                          <dgm:param type="linDir" val="fromL"/>
+                        </dgm:alg>
+                      </dgm:if>
+                      <dgm:else name="Name14">
+                        <dgm:alg type="hierChild">
+                          <dgm:param type="linDir" val="fromR"/>
+                        </dgm:alg>
+                      </dgm:else>
+                    </dgm:choose>
+                    <dgm:shape xmlns:r="http://schemas.openxmlformats.org/officeDocument/2006/relationships" r:blip="">
+                      <dgm:adjLst/>
+                    </dgm:shape>
+                    <dgm:presOf/>
+                    <dgm:constrLst/>
+                    <dgm:ruleLst/>
+                    <dgm:forEach name="Name15" axis="ch">
+                      <dgm:forEach name="Name16" axis="self" ptType="parTrans" cnt="1">
+                        <dgm:layoutNode name="Name17">
+                          <dgm:alg type="conn">
+                            <dgm:param type="dim" val="1D"/>
+                            <dgm:param type="endSty" val="noArr"/>
+                            <dgm:param type="connRout" val="bend"/>
+                            <dgm:param type="bendPt" val="end"/>
+                            <dgm:param type="begPts" val="bCtr"/>
+                            <dgm:param type="endPts" val="tCtr"/>
+                            <dgm:param type="srcNode" val="background2"/>
+                            <dgm:param type="dstNode" val="background3"/>
+                          </dgm:alg>
+                          <dgm:shape xmlns:r="http://schemas.openxmlformats.org/officeDocument/2006/relationships" type="conn" r:blip="" zOrderOff="-999">
+                            <dgm:adjLst/>
+                          </dgm:shape>
+                          <dgm:presOf axis="self"/>
+                          <dgm:constrLst>
+                            <dgm:constr type="begPad"/>
+                            <dgm:constr type="endPad"/>
+                          </dgm:constrLst>
+                          <dgm:ruleLst/>
+                        </dgm:layoutNode>
+                      </dgm:forEach>
+                      <dgm:forEach name="Name18" axis="self" ptType="node">
+                        <dgm:layoutNode name="hierRoot3">
+                          <dgm:alg type="hierRoot"/>
+                          <dgm:shape xmlns:r="http://schemas.openxmlformats.org/officeDocument/2006/relationships" r:blip="">
+                            <dgm:adjLst/>
+                          </dgm:shape>
+                          <dgm:presOf/>
+                          <dgm:constrLst>
+                            <dgm:constr type="bendDist" for="des" ptType="parTrans" refType="sp" fact="0.5"/>
+                          </dgm:constrLst>
+                          <dgm:ruleLst/>
+                          <dgm:layoutNode name="composite3">
+                            <dgm:alg type="composite"/>
+                            <dgm:shape xmlns:r="http://schemas.openxmlformats.org/officeDocument/2006/relationships" r:blip="">
+                              <dgm:adjLst/>
+                            </dgm:shape>
+                            <dgm:presOf/>
+                            <dgm:constrLst>
+                              <dgm:constr type="w" for="ch" forName="background3" refType="w" fact="0.9"/>
+                              <dgm:constr type="h" for="ch" forName="background3" refType="w" refFor="ch" refForName="background3" fact="0.635"/>
+                              <dgm:constr type="t" for="ch" forName="background3"/>
+                              <dgm:constr type="l" for="ch" forName="background3"/>
+                              <dgm:constr type="w" for="ch" forName="text3" refType="w" fact="0.9"/>
+                              <dgm:constr type="h" for="ch" forName="text3" refType="w" refFor="ch" refForName="text3" fact="0.635"/>
+                              <dgm:constr type="t" for="ch" forName="text3" refType="w" fact="0.095"/>
+                              <dgm:constr type="l" for="ch" forName="text3" refType="w" fact="0.1"/>
+                            </dgm:constrLst>
+                            <dgm:ruleLst/>
+                            <dgm:layoutNode name="background3" moveWith="text3">
+                              <dgm:alg type="sp"/>
+                              <dgm:shape xmlns:r="http://schemas.openxmlformats.org/officeDocument/2006/relationships" type="roundRect" r:blip="">
+                                <dgm:adjLst>
+                                  <dgm:adj idx="1" val="0.1"/>
+                                </dgm:adjLst>
+                              </dgm:shape>
+                              <dgm:presOf/>
+                              <dgm:constrLst/>
+                              <dgm:ruleLst/>
+                            </dgm:layoutNode>
+                            <dgm:layoutNode name="text3" styleLbl="fgAcc3">
+                              <dgm:varLst>
+                                <dgm:chPref val="3"/>
+                              </dgm:varLst>
+                              <dgm:alg type="tx"/>
+                              <dgm:shape xmlns:r="http://schemas.openxmlformats.org/officeDocument/2006/relationships" type="roundRect" r:blip="">
+                                <dgm:adjLst>
+                                  <dgm:adj idx="1" val="0.1"/>
+                                </dgm:adjLst>
+                              </dgm:shape>
+                              <dgm:presOf axis="self"/>
+                              <dgm:constrLst>
+                                <dgm:constr type="tMarg" refType="primFontSz" fact="0.3"/>
+                                <dgm:constr type="bMarg" refType="primFontSz" fact="0.3"/>
+                                <dgm:constr type="lMarg" refType="primFontSz" fact="0.3"/>
+                                <dgm:constr type="rMarg" refType="primFontSz" fact="0.3"/>
+                              </dgm:constrLst>
+                              <dgm:ruleLst>
+                                <dgm:rule type="primFontSz" val="5" fact="NaN" max="NaN"/>
+                              </dgm:ruleLst>
+                            </dgm:layoutNode>
+                          </dgm:layoutNode>
+                          <dgm:layoutNode name="hierChild4">
+                            <dgm:choose name="Name19">
+                              <dgm:if name="Name20" func="var" arg="dir" op="equ" val="norm">
+                                <dgm:alg type="hierChild">
+                                  <dgm:param type="linDir" val="fromL"/>
+                                </dgm:alg>
+                              </dgm:if>
+                              <dgm:else name="Name21">
+                                <dgm:alg type="hierChild">
+                                  <dgm:param type="linDir" val="fromR"/>
+                                </dgm:alg>
+                              </dgm:else>
+                            </dgm:choose>
+                            <dgm:shape xmlns:r="http://schemas.openxmlformats.org/officeDocument/2006/relationships" r:blip="">
+                              <dgm:adjLst/>
+                            </dgm:shape>
+                            <dgm:presOf/>
+                            <dgm:constrLst/>
+                            <dgm:ruleLst/>
+                            <dgm:forEach name="repeat" axis="ch">
+                              <dgm:forEach name="Name22" axis="self" ptType="parTrans" cnt="1">
+                                <dgm:layoutNode name="Name23">
+                                  <dgm:choose name="Name24">
+                                    <dgm:if name="Name25" axis="self" func="depth" op="lte" val="4">
+                                      <dgm:alg type="conn">
+                                        <dgm:param type="dim" val="1D"/>
+                                        <dgm:param type="endSty" val="noArr"/>
+                                        <dgm:param type="connRout" val="bend"/>
+                                        <dgm:param type="bendPt" val="end"/>
+                                        <dgm:param type="begPts" val="bCtr"/>
+                                        <dgm:param type="endPts" val="tCtr"/>
+                                        <dgm:param type="srcNode" val="background3"/>
+                                        <dgm:param type="dstNode" val="background4"/>
+                                      </dgm:alg>
+                                    </dgm:if>
+                                    <dgm:else name="Name26">
+                                      <dgm:alg type="conn">
+                                        <dgm:param type="dim" val="1D"/>
+                                        <dgm:param type="endSty" val="noArr"/>
+                                        <dgm:param type="connRout" val="bend"/>
+                                        <dgm:param type="bendPt" val="end"/>
+                                        <dgm:param type="begPts" val="bCtr"/>
+                                        <dgm:param type="endPts" val="tCtr"/>
+                                        <dgm:param type="srcNode" val="background4"/>
+                                        <dgm:param type="dstNode" val="background4"/>
+                                      </dgm:alg>
+                                    </dgm:else>
+                                  </dgm:choose>
+                                  <dgm:shape xmlns:r="http://schemas.openxmlformats.org/officeDocument/2006/relationships" type="conn" r:blip="" zOrderOff="-999">
+                                    <dgm:adjLst/>
+                                  </dgm:shape>
+                                  <dgm:presOf axis="self"/>
+                                  <dgm:constrLst>
+                                    <dgm:constr type="begPad"/>
+                                    <dgm:constr type="endPad"/>
+                                  </dgm:constrLst>
+                                  <dgm:ruleLst/>
+                                </dgm:layoutNode>
+                              </dgm:forEach>
+                              <dgm:forEach name="Name27" axis="self" ptType="node">
+                                <dgm:layoutNode name="hierRoot4">
+                                  <dgm:alg type="hierRoot"/>
+                                  <dgm:shape xmlns:r="http://schemas.openxmlformats.org/officeDocument/2006/relationships" r:blip="">
+                                    <dgm:adjLst/>
+                                  </dgm:shape>
+                                  <dgm:presOf/>
+                                  <dgm:constrLst>
+                                    <dgm:constr type="bendDist" for="des" ptType="parTrans" refType="sp" fact="0.5"/>
+                                  </dgm:constrLst>
+                                  <dgm:ruleLst/>
+                                  <dgm:layoutNode name="composite4">
+                                    <dgm:alg type="composite"/>
+                                    <dgm:shape xmlns:r="http://schemas.openxmlformats.org/officeDocument/2006/relationships" r:blip="">
+                                      <dgm:adjLst/>
+                                    </dgm:shape>
+                                    <dgm:presOf/>
+                                    <dgm:constrLst>
+                                      <dgm:constr type="w" for="ch" forName="background4" refType="w" fact="0.9"/>
+                                      <dgm:constr type="h" for="ch" forName="background4" refType="w" refFor="ch" refForName="background4" fact="0.635"/>
+                                      <dgm:constr type="t" for="ch" forName="background4"/>
+                                      <dgm:constr type="l" for="ch" forName="background4"/>
+                                      <dgm:constr type="w" for="ch" forName="text4" refType="w" fact="0.9"/>
+                                      <dgm:constr type="h" for="ch" forName="text4" refType="w" refFor="ch" refForName="text4" fact="0.635"/>
+                                      <dgm:constr type="t" for="ch" forName="text4" refType="w" fact="0.095"/>
+                                      <dgm:constr type="l" for="ch" forName="text4" refType="w" fact="0.1"/>
+                                    </dgm:constrLst>
+                                    <dgm:ruleLst/>
+                                    <dgm:layoutNode name="background4" moveWith="text4">
+                                      <dgm:alg type="sp"/>
+                                      <dgm:shape xmlns:r="http://schemas.openxmlformats.org/officeDocument/2006/relationships" type="roundRect" r:blip="">
+                                        <dgm:adjLst>
+                                          <dgm:adj idx="1" val="0.1"/>
+                                        </dgm:adjLst>
+                                      </dgm:shape>
+                                      <dgm:presOf/>
+                                      <dgm:constrLst/>
+                                      <dgm:ruleLst/>
+                                    </dgm:layoutNode>
+                                    <dgm:layoutNode name="text4" styleLbl="fgAcc4">
+                                      <dgm:varLst>
+                                        <dgm:chPref val="3"/>
+                                      </dgm:varLst>
+                                      <dgm:alg type="tx"/>
+                                      <dgm:shape xmlns:r="http://schemas.openxmlformats.org/officeDocument/2006/relationships" type="roundRect" r:blip="">
+                                        <dgm:adjLst>
+                                          <dgm:adj idx="1" val="0.1"/>
+                                        </dgm:adjLst>
+                                      </dgm:shape>
+                                      <dgm:presOf axis="self"/>
+                                      <dgm:constrLst>
+                                        <dgm:constr type="tMarg" refType="primFontSz" fact="0.3"/>
+                                        <dgm:constr type="bMarg" refType="primFontSz" fact="0.3"/>
+                                        <dgm:constr type="lMarg" refType="primFontSz" fact="0.3"/>
+                                        <dgm:constr type="rMarg" refType="primFontSz" fact="0.3"/>
+                                      </dgm:constrLst>
+                                      <dgm:ruleLst>
+                                        <dgm:rule type="primFontSz" val="5" fact="NaN" max="NaN"/>
+                                      </dgm:ruleLst>
+                                    </dgm:layoutNode>
+                                  </dgm:layoutNode>
+                                  <dgm:layoutNode name="hierChild5">
+                                    <dgm:choose name="Name28">
+                                      <dgm:if name="Name29" func="var" arg="dir" op="equ" val="norm">
+                                        <dgm:alg type="hierChild">
+                                          <dgm:param type="linDir" val="fromL"/>
+                                        </dgm:alg>
+                                      </dgm:if>
+                                      <dgm:else name="Name30">
+                                        <dgm:alg type="hierChild">
+                                          <dgm:param type="linDir" val="fromR"/>
+                                        </dgm:alg>
+                                      </dgm:else>
+                                    </dgm:choose>
+                                    <dgm:shape xmlns:r="http://schemas.openxmlformats.org/officeDocument/2006/relationships" r:blip="">
+                                      <dgm:adjLst/>
+                                    </dgm:shape>
+                                    <dgm:presOf/>
+                                    <dgm:constrLst/>
+                                    <dgm:ruleLst/>
+                                    <dgm:forEach name="Name31" ref="repeat"/>
+                                  </dgm:layoutNode>
+                                </dgm:layoutNode>
+                              </dgm:forEach>
+                            </dgm:forEach>
+                          </dgm:layoutNode>
+                        </dgm:layoutNode>
+                      </dgm:forEach>
+                    </dgm:forEach>
+                  </dgm:layoutNode>
+                </dgm:layoutNode>
+              </dgm:forEach>
+            </dgm:forEach>
+          </dgm:layoutNode>
+        </dgm:layoutNode>
+      </dgm:forEach>
+    </dgm:forEach>
+  </dgm:layoutNode>
+</dgm:layoutDef>
+</file>
+
+<file path=ppt/diagrams/layout2.xml><?xml version="1.0" encoding="utf-8"?>
 <dgm:layoutDef xmlns:dgm="http://schemas.openxmlformats.org/drawingml/2006/diagram" xmlns:a="http://schemas.openxmlformats.org/drawingml/2006/main" uniqueId="urn:microsoft.com/office/officeart/2018/2/layout/IconVerticalSolidList">
   <dgm:title val="Icon Vertical Solid List"/>
   <dgm:desc val="Use to show a series of visuals from top to bottom with Level 1 or Level 1 and Level 2 text grouped in a shape. Works best with icons or small pictures with lengthier descriptions."/>
@@ -3123,6 +4786,1040 @@
 </dgm:styleDef>
 </file>
 
+<file path=ppt/diagrams/quickStyle2.xml><?xml version="1.0" encoding="utf-8"?>
+<dgm:styleDef xmlns:dgm="http://schemas.openxmlformats.org/drawingml/2006/diagram" xmlns:a="http://schemas.openxmlformats.org/drawingml/2006/main" uniqueId="urn:microsoft.com/office/officeart/2005/8/quickstyle/simple1">
+  <dgm:title val=""/>
+  <dgm:desc val=""/>
+  <dgm:catLst>
+    <dgm:cat type="simple" pri="10100"/>
+  </dgm:catLst>
+  <dgm:scene3d>
+    <a:camera prst="orthographicFront"/>
+    <a:lightRig rig="threePt" dir="t"/>
+  </dgm:scene3d>
+  <dgm:styleLbl name="node0">
+    <dgm:scene3d>
+      <a:camera prst="orthographicFront"/>
+      <a:lightRig rig="threePt" dir="t"/>
+    </dgm:scene3d>
+    <dgm:sp3d/>
+    <dgm:txPr/>
+    <dgm:style>
+      <a:lnRef idx="2">
+        <a:scrgbClr r="0" g="0" b="0"/>
+      </a:lnRef>
+      <a:fillRef idx="1">
+        <a:scrgbClr r="0" g="0" b="0"/>
+      </a:fillRef>
+      <a:effectRef idx="0">
+        <a:scrgbClr r="0" g="0" b="0"/>
+      </a:effectRef>
+      <a:fontRef idx="minor">
+        <a:schemeClr val="lt1"/>
+      </a:fontRef>
+    </dgm:style>
+  </dgm:styleLbl>
+  <dgm:styleLbl name="lnNode1">
+    <dgm:scene3d>
+      <a:camera prst="orthographicFront"/>
+      <a:lightRig rig="threePt" dir="t"/>
+    </dgm:scene3d>
+    <dgm:sp3d/>
+    <dgm:txPr/>
+    <dgm:style>
+      <a:lnRef idx="2">
+        <a:scrgbClr r="0" g="0" b="0"/>
+      </a:lnRef>
+      <a:fillRef idx="1">
+        <a:scrgbClr r="0" g="0" b="0"/>
+      </a:fillRef>
+      <a:effectRef idx="0">
+        <a:scrgbClr r="0" g="0" b="0"/>
+      </a:effectRef>
+      <a:fontRef idx="minor">
+        <a:schemeClr val="lt1"/>
+      </a:fontRef>
+    </dgm:style>
+  </dgm:styleLbl>
+  <dgm:styleLbl name="vennNode1">
+    <dgm:scene3d>
+      <a:camera prst="orthographicFront"/>
+      <a:lightRig rig="threePt" dir="t"/>
+    </dgm:scene3d>
+    <dgm:sp3d/>
+    <dgm:txPr/>
+    <dgm:style>
+      <a:lnRef idx="2">
+        <a:scrgbClr r="0" g="0" b="0"/>
+      </a:lnRef>
+      <a:fillRef idx="1">
+        <a:scrgbClr r="0" g="0" b="0"/>
+      </a:fillRef>
+      <a:effectRef idx="0">
+        <a:scrgbClr r="0" g="0" b="0"/>
+      </a:effectRef>
+      <a:fontRef idx="minor">
+        <a:schemeClr val="tx1"/>
+      </a:fontRef>
+    </dgm:style>
+  </dgm:styleLbl>
+  <dgm:styleLbl name="alignNode1">
+    <dgm:scene3d>
+      <a:camera prst="orthographicFront"/>
+      <a:lightRig rig="threePt" dir="t"/>
+    </dgm:scene3d>
+    <dgm:sp3d/>
+    <dgm:txPr/>
+    <dgm:style>
+      <a:lnRef idx="2">
+        <a:scrgbClr r="0" g="0" b="0"/>
+      </a:lnRef>
+      <a:fillRef idx="1">
+        <a:scrgbClr r="0" g="0" b="0"/>
+      </a:fillRef>
+      <a:effectRef idx="0">
+        <a:scrgbClr r="0" g="0" b="0"/>
+      </a:effectRef>
+      <a:fontRef idx="minor">
+        <a:schemeClr val="lt1"/>
+      </a:fontRef>
+    </dgm:style>
+  </dgm:styleLbl>
+  <dgm:styleLbl name="node1">
+    <dgm:scene3d>
+      <a:camera prst="orthographicFront"/>
+      <a:lightRig rig="threePt" dir="t"/>
+    </dgm:scene3d>
+    <dgm:sp3d/>
+    <dgm:txPr/>
+    <dgm:style>
+      <a:lnRef idx="2">
+        <a:scrgbClr r="0" g="0" b="0"/>
+      </a:lnRef>
+      <a:fillRef idx="1">
+        <a:scrgbClr r="0" g="0" b="0"/>
+      </a:fillRef>
+      <a:effectRef idx="0">
+        <a:scrgbClr r="0" g="0" b="0"/>
+      </a:effectRef>
+      <a:fontRef idx="minor">
+        <a:schemeClr val="lt1"/>
+      </a:fontRef>
+    </dgm:style>
+  </dgm:styleLbl>
+  <dgm:styleLbl name="node2">
+    <dgm:scene3d>
+      <a:camera prst="orthographicFront"/>
+      <a:lightRig rig="threePt" dir="t"/>
+    </dgm:scene3d>
+    <dgm:sp3d/>
+    <dgm:txPr/>
+    <dgm:style>
+      <a:lnRef idx="2">
+        <a:scrgbClr r="0" g="0" b="0"/>
+      </a:lnRef>
+      <a:fillRef idx="1">
+        <a:scrgbClr r="0" g="0" b="0"/>
+      </a:fillRef>
+      <a:effectRef idx="0">
+        <a:scrgbClr r="0" g="0" b="0"/>
+      </a:effectRef>
+      <a:fontRef idx="minor">
+        <a:schemeClr val="lt1"/>
+      </a:fontRef>
+    </dgm:style>
+  </dgm:styleLbl>
+  <dgm:styleLbl name="node3">
+    <dgm:scene3d>
+      <a:camera prst="orthographicFront"/>
+      <a:lightRig rig="threePt" dir="t"/>
+    </dgm:scene3d>
+    <dgm:sp3d/>
+    <dgm:txPr/>
+    <dgm:style>
+      <a:lnRef idx="2">
+        <a:scrgbClr r="0" g="0" b="0"/>
+      </a:lnRef>
+      <a:fillRef idx="1">
+        <a:scrgbClr r="0" g="0" b="0"/>
+      </a:fillRef>
+      <a:effectRef idx="0">
+        <a:scrgbClr r="0" g="0" b="0"/>
+      </a:effectRef>
+      <a:fontRef idx="minor">
+        <a:schemeClr val="lt1"/>
+      </a:fontRef>
+    </dgm:style>
+  </dgm:styleLbl>
+  <dgm:styleLbl name="node4">
+    <dgm:scene3d>
+      <a:camera prst="orthographicFront"/>
+      <a:lightRig rig="threePt" dir="t"/>
+    </dgm:scene3d>
+    <dgm:sp3d/>
+    <dgm:txPr/>
+    <dgm:style>
+      <a:lnRef idx="2">
+        <a:scrgbClr r="0" g="0" b="0"/>
+      </a:lnRef>
+      <a:fillRef idx="1">
+        <a:scrgbClr r="0" g="0" b="0"/>
+      </a:fillRef>
+      <a:effectRef idx="0">
+        <a:scrgbClr r="0" g="0" b="0"/>
+      </a:effectRef>
+      <a:fontRef idx="minor">
+        <a:schemeClr val="lt1"/>
+      </a:fontRef>
+    </dgm:style>
+  </dgm:styleLbl>
+  <dgm:styleLbl name="fgImgPlace1">
+    <dgm:scene3d>
+      <a:camera prst="orthographicFront"/>
+      <a:lightRig rig="threePt" dir="t"/>
+    </dgm:scene3d>
+    <dgm:sp3d/>
+    <dgm:txPr/>
+    <dgm:style>
+      <a:lnRef idx="2">
+        <a:scrgbClr r="0" g="0" b="0"/>
+      </a:lnRef>
+      <a:fillRef idx="1">
+        <a:scrgbClr r="0" g="0" b="0"/>
+      </a:fillRef>
+      <a:effectRef idx="0">
+        <a:scrgbClr r="0" g="0" b="0"/>
+      </a:effectRef>
+      <a:fontRef idx="minor"/>
+    </dgm:style>
+  </dgm:styleLbl>
+  <dgm:styleLbl name="alignImgPlace1">
+    <dgm:scene3d>
+      <a:camera prst="orthographicFront"/>
+      <a:lightRig rig="threePt" dir="t"/>
+    </dgm:scene3d>
+    <dgm:sp3d/>
+    <dgm:txPr/>
+    <dgm:style>
+      <a:lnRef idx="2">
+        <a:scrgbClr r="0" g="0" b="0"/>
+      </a:lnRef>
+      <a:fillRef idx="1">
+        <a:scrgbClr r="0" g="0" b="0"/>
+      </a:fillRef>
+      <a:effectRef idx="0">
+        <a:scrgbClr r="0" g="0" b="0"/>
+      </a:effectRef>
+      <a:fontRef idx="minor"/>
+    </dgm:style>
+  </dgm:styleLbl>
+  <dgm:styleLbl name="bgImgPlace1">
+    <dgm:scene3d>
+      <a:camera prst="orthographicFront"/>
+      <a:lightRig rig="threePt" dir="t"/>
+    </dgm:scene3d>
+    <dgm:sp3d/>
+    <dgm:txPr/>
+    <dgm:style>
+      <a:lnRef idx="2">
+        <a:scrgbClr r="0" g="0" b="0"/>
+      </a:lnRef>
+      <a:fillRef idx="1">
+        <a:scrgbClr r="0" g="0" b="0"/>
+      </a:fillRef>
+      <a:effectRef idx="0">
+        <a:scrgbClr r="0" g="0" b="0"/>
+      </a:effectRef>
+      <a:fontRef idx="minor"/>
+    </dgm:style>
+  </dgm:styleLbl>
+  <dgm:styleLbl name="sibTrans2D1">
+    <dgm:scene3d>
+      <a:camera prst="orthographicFront"/>
+      <a:lightRig rig="threePt" dir="t"/>
+    </dgm:scene3d>
+    <dgm:sp3d/>
+    <dgm:txPr/>
+    <dgm:style>
+      <a:lnRef idx="0">
+        <a:scrgbClr r="0" g="0" b="0"/>
+      </a:lnRef>
+      <a:fillRef idx="1">
+        <a:scrgbClr r="0" g="0" b="0"/>
+      </a:fillRef>
+      <a:effectRef idx="0">
+        <a:scrgbClr r="0" g="0" b="0"/>
+      </a:effectRef>
+      <a:fontRef idx="minor">
+        <a:schemeClr val="lt1"/>
+      </a:fontRef>
+    </dgm:style>
+  </dgm:styleLbl>
+  <dgm:styleLbl name="fgSibTrans2D1">
+    <dgm:scene3d>
+      <a:camera prst="orthographicFront"/>
+      <a:lightRig rig="threePt" dir="t"/>
+    </dgm:scene3d>
+    <dgm:sp3d/>
+    <dgm:txPr/>
+    <dgm:style>
+      <a:lnRef idx="0">
+        <a:scrgbClr r="0" g="0" b="0"/>
+      </a:lnRef>
+      <a:fillRef idx="1">
+        <a:scrgbClr r="0" g="0" b="0"/>
+      </a:fillRef>
+      <a:effectRef idx="0">
+        <a:scrgbClr r="0" g="0" b="0"/>
+      </a:effectRef>
+      <a:fontRef idx="minor">
+        <a:schemeClr val="lt1"/>
+      </a:fontRef>
+    </dgm:style>
+  </dgm:styleLbl>
+  <dgm:styleLbl name="bgSibTrans2D1">
+    <dgm:scene3d>
+      <a:camera prst="orthographicFront"/>
+      <a:lightRig rig="threePt" dir="t"/>
+    </dgm:scene3d>
+    <dgm:sp3d/>
+    <dgm:txPr/>
+    <dgm:style>
+      <a:lnRef idx="0">
+        <a:scrgbClr r="0" g="0" b="0"/>
+      </a:lnRef>
+      <a:fillRef idx="1">
+        <a:scrgbClr r="0" g="0" b="0"/>
+      </a:fillRef>
+      <a:effectRef idx="0">
+        <a:scrgbClr r="0" g="0" b="0"/>
+      </a:effectRef>
+      <a:fontRef idx="minor">
+        <a:schemeClr val="lt1"/>
+      </a:fontRef>
+    </dgm:style>
+  </dgm:styleLbl>
+  <dgm:styleLbl name="sibTrans1D1">
+    <dgm:scene3d>
+      <a:camera prst="orthographicFront"/>
+      <a:lightRig rig="threePt" dir="t"/>
+    </dgm:scene3d>
+    <dgm:sp3d/>
+    <dgm:txPr/>
+    <dgm:style>
+      <a:lnRef idx="1">
+        <a:scrgbClr r="0" g="0" b="0"/>
+      </a:lnRef>
+      <a:fillRef idx="0">
+        <a:scrgbClr r="0" g="0" b="0"/>
+      </a:fillRef>
+      <a:effectRef idx="0">
+        <a:scrgbClr r="0" g="0" b="0"/>
+      </a:effectRef>
+      <a:fontRef idx="minor"/>
+    </dgm:style>
+  </dgm:styleLbl>
+  <dgm:styleLbl name="callout">
+    <dgm:scene3d>
+      <a:camera prst="orthographicFront"/>
+      <a:lightRig rig="threePt" dir="t"/>
+    </dgm:scene3d>
+    <dgm:sp3d/>
+    <dgm:txPr/>
+    <dgm:style>
+      <a:lnRef idx="2">
+        <a:scrgbClr r="0" g="0" b="0"/>
+      </a:lnRef>
+      <a:fillRef idx="1">
+        <a:scrgbClr r="0" g="0" b="0"/>
+      </a:fillRef>
+      <a:effectRef idx="0">
+        <a:scrgbClr r="0" g="0" b="0"/>
+      </a:effectRef>
+      <a:fontRef idx="minor"/>
+    </dgm:style>
+  </dgm:styleLbl>
+  <dgm:styleLbl name="asst0">
+    <dgm:scene3d>
+      <a:camera prst="orthographicFront"/>
+      <a:lightRig rig="threePt" dir="t"/>
+    </dgm:scene3d>
+    <dgm:sp3d/>
+    <dgm:txPr/>
+    <dgm:style>
+      <a:lnRef idx="2">
+        <a:scrgbClr r="0" g="0" b="0"/>
+      </a:lnRef>
+      <a:fillRef idx="1">
+        <a:scrgbClr r="0" g="0" b="0"/>
+      </a:fillRef>
+      <a:effectRef idx="0">
+        <a:scrgbClr r="0" g="0" b="0"/>
+      </a:effectRef>
+      <a:fontRef idx="minor">
+        <a:schemeClr val="lt1"/>
+      </a:fontRef>
+    </dgm:style>
+  </dgm:styleLbl>
+  <dgm:styleLbl name="asst1">
+    <dgm:scene3d>
+      <a:camera prst="orthographicFront"/>
+      <a:lightRig rig="threePt" dir="t"/>
+    </dgm:scene3d>
+    <dgm:sp3d/>
+    <dgm:txPr/>
+    <dgm:style>
+      <a:lnRef idx="2">
+        <a:scrgbClr r="0" g="0" b="0"/>
+      </a:lnRef>
+      <a:fillRef idx="1">
+        <a:scrgbClr r="0" g="0" b="0"/>
+      </a:fillRef>
+      <a:effectRef idx="0">
+        <a:scrgbClr r="0" g="0" b="0"/>
+      </a:effectRef>
+      <a:fontRef idx="minor">
+        <a:schemeClr val="lt1"/>
+      </a:fontRef>
+    </dgm:style>
+  </dgm:styleLbl>
+  <dgm:styleLbl name="asst2">
+    <dgm:scene3d>
+      <a:camera prst="orthographicFront"/>
+      <a:lightRig rig="threePt" dir="t"/>
+    </dgm:scene3d>
+    <dgm:sp3d/>
+    <dgm:txPr/>
+    <dgm:style>
+      <a:lnRef idx="2">
+        <a:scrgbClr r="0" g="0" b="0"/>
+      </a:lnRef>
+      <a:fillRef idx="1">
+        <a:scrgbClr r="0" g="0" b="0"/>
+      </a:fillRef>
+      <a:effectRef idx="0">
+        <a:scrgbClr r="0" g="0" b="0"/>
+      </a:effectRef>
+      <a:fontRef idx="minor">
+        <a:schemeClr val="lt1"/>
+      </a:fontRef>
+    </dgm:style>
+  </dgm:styleLbl>
+  <dgm:styleLbl name="asst3">
+    <dgm:scene3d>
+      <a:camera prst="orthographicFront"/>
+      <a:lightRig rig="threePt" dir="t"/>
+    </dgm:scene3d>
+    <dgm:sp3d/>
+    <dgm:txPr/>
+    <dgm:style>
+      <a:lnRef idx="2">
+        <a:scrgbClr r="0" g="0" b="0"/>
+      </a:lnRef>
+      <a:fillRef idx="1">
+        <a:scrgbClr r="0" g="0" b="0"/>
+      </a:fillRef>
+      <a:effectRef idx="0">
+        <a:scrgbClr r="0" g="0" b="0"/>
+      </a:effectRef>
+      <a:fontRef idx="minor">
+        <a:schemeClr val="lt1"/>
+      </a:fontRef>
+    </dgm:style>
+  </dgm:styleLbl>
+  <dgm:styleLbl name="asst4">
+    <dgm:scene3d>
+      <a:camera prst="orthographicFront"/>
+      <a:lightRig rig="threePt" dir="t"/>
+    </dgm:scene3d>
+    <dgm:sp3d/>
+    <dgm:txPr/>
+    <dgm:style>
+      <a:lnRef idx="2">
+        <a:scrgbClr r="0" g="0" b="0"/>
+      </a:lnRef>
+      <a:fillRef idx="1">
+        <a:scrgbClr r="0" g="0" b="0"/>
+      </a:fillRef>
+      <a:effectRef idx="0">
+        <a:scrgbClr r="0" g="0" b="0"/>
+      </a:effectRef>
+      <a:fontRef idx="minor">
+        <a:schemeClr val="lt1"/>
+      </a:fontRef>
+    </dgm:style>
+  </dgm:styleLbl>
+  <dgm:styleLbl name="parChTrans2D1">
+    <dgm:scene3d>
+      <a:camera prst="orthographicFront"/>
+      <a:lightRig rig="threePt" dir="t"/>
+    </dgm:scene3d>
+    <dgm:sp3d/>
+    <dgm:txPr/>
+    <dgm:style>
+      <a:lnRef idx="2">
+        <a:scrgbClr r="0" g="0" b="0"/>
+      </a:lnRef>
+      <a:fillRef idx="1">
+        <a:scrgbClr r="0" g="0" b="0"/>
+      </a:fillRef>
+      <a:effectRef idx="0">
+        <a:scrgbClr r="0" g="0" b="0"/>
+      </a:effectRef>
+      <a:fontRef idx="minor">
+        <a:schemeClr val="lt1"/>
+      </a:fontRef>
+    </dgm:style>
+  </dgm:styleLbl>
+  <dgm:styleLbl name="parChTrans2D2">
+    <dgm:scene3d>
+      <a:camera prst="orthographicFront"/>
+      <a:lightRig rig="threePt" dir="t"/>
+    </dgm:scene3d>
+    <dgm:sp3d/>
+    <dgm:txPr/>
+    <dgm:style>
+      <a:lnRef idx="2">
+        <a:scrgbClr r="0" g="0" b="0"/>
+      </a:lnRef>
+      <a:fillRef idx="1">
+        <a:scrgbClr r="0" g="0" b="0"/>
+      </a:fillRef>
+      <a:effectRef idx="0">
+        <a:scrgbClr r="0" g="0" b="0"/>
+      </a:effectRef>
+      <a:fontRef idx="minor">
+        <a:schemeClr val="lt1"/>
+      </a:fontRef>
+    </dgm:style>
+  </dgm:styleLbl>
+  <dgm:styleLbl name="parChTrans2D3">
+    <dgm:scene3d>
+      <a:camera prst="orthographicFront"/>
+      <a:lightRig rig="threePt" dir="t"/>
+    </dgm:scene3d>
+    <dgm:sp3d/>
+    <dgm:txPr/>
+    <dgm:style>
+      <a:lnRef idx="2">
+        <a:scrgbClr r="0" g="0" b="0"/>
+      </a:lnRef>
+      <a:fillRef idx="1">
+        <a:scrgbClr r="0" g="0" b="0"/>
+      </a:fillRef>
+      <a:effectRef idx="0">
+        <a:scrgbClr r="0" g="0" b="0"/>
+      </a:effectRef>
+      <a:fontRef idx="minor">
+        <a:schemeClr val="lt1"/>
+      </a:fontRef>
+    </dgm:style>
+  </dgm:styleLbl>
+  <dgm:styleLbl name="parChTrans2D4">
+    <dgm:scene3d>
+      <a:camera prst="orthographicFront"/>
+      <a:lightRig rig="threePt" dir="t"/>
+    </dgm:scene3d>
+    <dgm:sp3d/>
+    <dgm:txPr/>
+    <dgm:style>
+      <a:lnRef idx="2">
+        <a:scrgbClr r="0" g="0" b="0"/>
+      </a:lnRef>
+      <a:fillRef idx="1">
+        <a:scrgbClr r="0" g="0" b="0"/>
+      </a:fillRef>
+      <a:effectRef idx="0">
+        <a:scrgbClr r="0" g="0" b="0"/>
+      </a:effectRef>
+      <a:fontRef idx="minor">
+        <a:schemeClr val="lt1"/>
+      </a:fontRef>
+    </dgm:style>
+  </dgm:styleLbl>
+  <dgm:styleLbl name="parChTrans1D1">
+    <dgm:scene3d>
+      <a:camera prst="orthographicFront"/>
+      <a:lightRig rig="threePt" dir="t"/>
+    </dgm:scene3d>
+    <dgm:sp3d/>
+    <dgm:txPr/>
+    <dgm:style>
+      <a:lnRef idx="2">
+        <a:scrgbClr r="0" g="0" b="0"/>
+      </a:lnRef>
+      <a:fillRef idx="0">
+        <a:scrgbClr r="0" g="0" b="0"/>
+      </a:fillRef>
+      <a:effectRef idx="0">
+        <a:scrgbClr r="0" g="0" b="0"/>
+      </a:effectRef>
+      <a:fontRef idx="minor"/>
+    </dgm:style>
+  </dgm:styleLbl>
+  <dgm:styleLbl name="parChTrans1D2">
+    <dgm:scene3d>
+      <a:camera prst="orthographicFront"/>
+      <a:lightRig rig="threePt" dir="t"/>
+    </dgm:scene3d>
+    <dgm:sp3d/>
+    <dgm:txPr/>
+    <dgm:style>
+      <a:lnRef idx="2">
+        <a:scrgbClr r="0" g="0" b="0"/>
+      </a:lnRef>
+      <a:fillRef idx="0">
+        <a:scrgbClr r="0" g="0" b="0"/>
+      </a:fillRef>
+      <a:effectRef idx="0">
+        <a:scrgbClr r="0" g="0" b="0"/>
+      </a:effectRef>
+      <a:fontRef idx="minor"/>
+    </dgm:style>
+  </dgm:styleLbl>
+  <dgm:styleLbl name="parChTrans1D3">
+    <dgm:scene3d>
+      <a:camera prst="orthographicFront"/>
+      <a:lightRig rig="threePt" dir="t"/>
+    </dgm:scene3d>
+    <dgm:sp3d/>
+    <dgm:txPr/>
+    <dgm:style>
+      <a:lnRef idx="2">
+        <a:scrgbClr r="0" g="0" b="0"/>
+      </a:lnRef>
+      <a:fillRef idx="0">
+        <a:scrgbClr r="0" g="0" b="0"/>
+      </a:fillRef>
+      <a:effectRef idx="0">
+        <a:scrgbClr r="0" g="0" b="0"/>
+      </a:effectRef>
+      <a:fontRef idx="minor"/>
+    </dgm:style>
+  </dgm:styleLbl>
+  <dgm:styleLbl name="parChTrans1D4">
+    <dgm:scene3d>
+      <a:camera prst="orthographicFront"/>
+      <a:lightRig rig="threePt" dir="t"/>
+    </dgm:scene3d>
+    <dgm:sp3d/>
+    <dgm:txPr/>
+    <dgm:style>
+      <a:lnRef idx="2">
+        <a:scrgbClr r="0" g="0" b="0"/>
+      </a:lnRef>
+      <a:fillRef idx="0">
+        <a:scrgbClr r="0" g="0" b="0"/>
+      </a:fillRef>
+      <a:effectRef idx="0">
+        <a:scrgbClr r="0" g="0" b="0"/>
+      </a:effectRef>
+      <a:fontRef idx="minor"/>
+    </dgm:style>
+  </dgm:styleLbl>
+  <dgm:styleLbl name="fgAcc1">
+    <dgm:scene3d>
+      <a:camera prst="orthographicFront"/>
+      <a:lightRig rig="threePt" dir="t"/>
+    </dgm:scene3d>
+    <dgm:sp3d/>
+    <dgm:txPr/>
+    <dgm:style>
+      <a:lnRef idx="2">
+        <a:scrgbClr r="0" g="0" b="0"/>
+      </a:lnRef>
+      <a:fillRef idx="1">
+        <a:scrgbClr r="0" g="0" b="0"/>
+      </a:fillRef>
+      <a:effectRef idx="0">
+        <a:scrgbClr r="0" g="0" b="0"/>
+      </a:effectRef>
+      <a:fontRef idx="minor"/>
+    </dgm:style>
+  </dgm:styleLbl>
+  <dgm:styleLbl name="conFgAcc1">
+    <dgm:scene3d>
+      <a:camera prst="orthographicFront"/>
+      <a:lightRig rig="threePt" dir="t"/>
+    </dgm:scene3d>
+    <dgm:sp3d/>
+    <dgm:txPr/>
+    <dgm:style>
+      <a:lnRef idx="2">
+        <a:scrgbClr r="0" g="0" b="0"/>
+      </a:lnRef>
+      <a:fillRef idx="1">
+        <a:scrgbClr r="0" g="0" b="0"/>
+      </a:fillRef>
+      <a:effectRef idx="0">
+        <a:scrgbClr r="0" g="0" b="0"/>
+      </a:effectRef>
+      <a:fontRef idx="minor"/>
+    </dgm:style>
+  </dgm:styleLbl>
+  <dgm:styleLbl name="alignAcc1">
+    <dgm:scene3d>
+      <a:camera prst="orthographicFront"/>
+      <a:lightRig rig="threePt" dir="t"/>
+    </dgm:scene3d>
+    <dgm:sp3d/>
+    <dgm:txPr/>
+    <dgm:style>
+      <a:lnRef idx="2">
+        <a:scrgbClr r="0" g="0" b="0"/>
+      </a:lnRef>
+      <a:fillRef idx="1">
+        <a:scrgbClr r="0" g="0" b="0"/>
+      </a:fillRef>
+      <a:effectRef idx="0">
+        <a:scrgbClr r="0" g="0" b="0"/>
+      </a:effectRef>
+      <a:fontRef idx="minor"/>
+    </dgm:style>
+  </dgm:styleLbl>
+  <dgm:styleLbl name="trAlignAcc1">
+    <dgm:scene3d>
+      <a:camera prst="orthographicFront"/>
+      <a:lightRig rig="threePt" dir="t"/>
+    </dgm:scene3d>
+    <dgm:sp3d/>
+    <dgm:txPr/>
+    <dgm:style>
+      <a:lnRef idx="1">
+        <a:scrgbClr r="0" g="0" b="0"/>
+      </a:lnRef>
+      <a:fillRef idx="1">
+        <a:scrgbClr r="0" g="0" b="0"/>
+      </a:fillRef>
+      <a:effectRef idx="0">
+        <a:scrgbClr r="0" g="0" b="0"/>
+      </a:effectRef>
+      <a:fontRef idx="minor"/>
+    </dgm:style>
+  </dgm:styleLbl>
+  <dgm:styleLbl name="bgAcc1">
+    <dgm:scene3d>
+      <a:camera prst="orthographicFront"/>
+      <a:lightRig rig="threePt" dir="t"/>
+    </dgm:scene3d>
+    <dgm:sp3d/>
+    <dgm:txPr/>
+    <dgm:style>
+      <a:lnRef idx="2">
+        <a:scrgbClr r="0" g="0" b="0"/>
+      </a:lnRef>
+      <a:fillRef idx="1">
+        <a:scrgbClr r="0" g="0" b="0"/>
+      </a:fillRef>
+      <a:effectRef idx="0">
+        <a:scrgbClr r="0" g="0" b="0"/>
+      </a:effectRef>
+      <a:fontRef idx="minor"/>
+    </dgm:style>
+  </dgm:styleLbl>
+  <dgm:styleLbl name="solidFgAcc1">
+    <dgm:scene3d>
+      <a:camera prst="orthographicFront"/>
+      <a:lightRig rig="threePt" dir="t"/>
+    </dgm:scene3d>
+    <dgm:sp3d/>
+    <dgm:txPr/>
+    <dgm:style>
+      <a:lnRef idx="2">
+        <a:scrgbClr r="0" g="0" b="0"/>
+      </a:lnRef>
+      <a:fillRef idx="1">
+        <a:scrgbClr r="0" g="0" b="0"/>
+      </a:fillRef>
+      <a:effectRef idx="0">
+        <a:scrgbClr r="0" g="0" b="0"/>
+      </a:effectRef>
+      <a:fontRef idx="minor"/>
+    </dgm:style>
+  </dgm:styleLbl>
+  <dgm:styleLbl name="solidAlignAcc1">
+    <dgm:scene3d>
+      <a:camera prst="orthographicFront"/>
+      <a:lightRig rig="threePt" dir="t"/>
+    </dgm:scene3d>
+    <dgm:sp3d/>
+    <dgm:txPr/>
+    <dgm:style>
+      <a:lnRef idx="2">
+        <a:scrgbClr r="0" g="0" b="0"/>
+      </a:lnRef>
+      <a:fillRef idx="1">
+        <a:scrgbClr r="0" g="0" b="0"/>
+      </a:fillRef>
+      <a:effectRef idx="0">
+        <a:scrgbClr r="0" g="0" b="0"/>
+      </a:effectRef>
+      <a:fontRef idx="minor"/>
+    </dgm:style>
+  </dgm:styleLbl>
+  <dgm:styleLbl name="solidBgAcc1">
+    <dgm:scene3d>
+      <a:camera prst="orthographicFront"/>
+      <a:lightRig rig="threePt" dir="t"/>
+    </dgm:scene3d>
+    <dgm:sp3d/>
+    <dgm:txPr/>
+    <dgm:style>
+      <a:lnRef idx="2">
+        <a:scrgbClr r="0" g="0" b="0"/>
+      </a:lnRef>
+      <a:fillRef idx="1">
+        <a:scrgbClr r="0" g="0" b="0"/>
+      </a:fillRef>
+      <a:effectRef idx="0">
+        <a:scrgbClr r="0" g="0" b="0"/>
+      </a:effectRef>
+      <a:fontRef idx="minor"/>
+    </dgm:style>
+  </dgm:styleLbl>
+  <dgm:styleLbl name="fgAccFollowNode1">
+    <dgm:scene3d>
+      <a:camera prst="orthographicFront"/>
+      <a:lightRig rig="threePt" dir="t"/>
+    </dgm:scene3d>
+    <dgm:sp3d/>
+    <dgm:txPr/>
+    <dgm:style>
+      <a:lnRef idx="2">
+        <a:scrgbClr r="0" g="0" b="0"/>
+      </a:lnRef>
+      <a:fillRef idx="1">
+        <a:scrgbClr r="0" g="0" b="0"/>
+      </a:fillRef>
+      <a:effectRef idx="0">
+        <a:scrgbClr r="0" g="0" b="0"/>
+      </a:effectRef>
+      <a:fontRef idx="minor"/>
+    </dgm:style>
+  </dgm:styleLbl>
+  <dgm:styleLbl name="alignAccFollowNode1">
+    <dgm:scene3d>
+      <a:camera prst="orthographicFront"/>
+      <a:lightRig rig="threePt" dir="t"/>
+    </dgm:scene3d>
+    <dgm:sp3d/>
+    <dgm:txPr/>
+    <dgm:style>
+      <a:lnRef idx="2">
+        <a:scrgbClr r="0" g="0" b="0"/>
+      </a:lnRef>
+      <a:fillRef idx="1">
+        <a:scrgbClr r="0" g="0" b="0"/>
+      </a:fillRef>
+      <a:effectRef idx="0">
+        <a:scrgbClr r="0" g="0" b="0"/>
+      </a:effectRef>
+      <a:fontRef idx="minor"/>
+    </dgm:style>
+  </dgm:styleLbl>
+  <dgm:styleLbl name="bgAccFollowNode1">
+    <dgm:scene3d>
+      <a:camera prst="orthographicFront"/>
+      <a:lightRig rig="threePt" dir="t"/>
+    </dgm:scene3d>
+    <dgm:sp3d/>
+    <dgm:txPr/>
+    <dgm:style>
+      <a:lnRef idx="2">
+        <a:scrgbClr r="0" g="0" b="0"/>
+      </a:lnRef>
+      <a:fillRef idx="1">
+        <a:scrgbClr r="0" g="0" b="0"/>
+      </a:fillRef>
+      <a:effectRef idx="0">
+        <a:scrgbClr r="0" g="0" b="0"/>
+      </a:effectRef>
+      <a:fontRef idx="minor"/>
+    </dgm:style>
+  </dgm:styleLbl>
+  <dgm:styleLbl name="fgAcc0">
+    <dgm:scene3d>
+      <a:camera prst="orthographicFront"/>
+      <a:lightRig rig="threePt" dir="t"/>
+    </dgm:scene3d>
+    <dgm:sp3d/>
+    <dgm:txPr/>
+    <dgm:style>
+      <a:lnRef idx="2">
+        <a:scrgbClr r="0" g="0" b="0"/>
+      </a:lnRef>
+      <a:fillRef idx="1">
+        <a:scrgbClr r="0" g="0" b="0"/>
+      </a:fillRef>
+      <a:effectRef idx="0">
+        <a:scrgbClr r="0" g="0" b="0"/>
+      </a:effectRef>
+      <a:fontRef idx="minor"/>
+    </dgm:style>
+  </dgm:styleLbl>
+  <dgm:styleLbl name="fgAcc2">
+    <dgm:scene3d>
+      <a:camera prst="orthographicFront"/>
+      <a:lightRig rig="threePt" dir="t"/>
+    </dgm:scene3d>
+    <dgm:sp3d/>
+    <dgm:txPr/>
+    <dgm:style>
+      <a:lnRef idx="2">
+        <a:scrgbClr r="0" g="0" b="0"/>
+      </a:lnRef>
+      <a:fillRef idx="1">
+        <a:scrgbClr r="0" g="0" b="0"/>
+      </a:fillRef>
+      <a:effectRef idx="0">
+        <a:scrgbClr r="0" g="0" b="0"/>
+      </a:effectRef>
+      <a:fontRef idx="minor"/>
+    </dgm:style>
+  </dgm:styleLbl>
+  <dgm:styleLbl name="fgAcc3">
+    <dgm:scene3d>
+      <a:camera prst="orthographicFront"/>
+      <a:lightRig rig="threePt" dir="t"/>
+    </dgm:scene3d>
+    <dgm:sp3d/>
+    <dgm:txPr/>
+    <dgm:style>
+      <a:lnRef idx="2">
+        <a:scrgbClr r="0" g="0" b="0"/>
+      </a:lnRef>
+      <a:fillRef idx="1">
+        <a:scrgbClr r="0" g="0" b="0"/>
+      </a:fillRef>
+      <a:effectRef idx="0">
+        <a:scrgbClr r="0" g="0" b="0"/>
+      </a:effectRef>
+      <a:fontRef idx="minor"/>
+    </dgm:style>
+  </dgm:styleLbl>
+  <dgm:styleLbl name="fgAcc4">
+    <dgm:scene3d>
+      <a:camera prst="orthographicFront"/>
+      <a:lightRig rig="threePt" dir="t"/>
+    </dgm:scene3d>
+    <dgm:sp3d/>
+    <dgm:txPr/>
+    <dgm:style>
+      <a:lnRef idx="2">
+        <a:scrgbClr r="0" g="0" b="0"/>
+      </a:lnRef>
+      <a:fillRef idx="1">
+        <a:scrgbClr r="0" g="0" b="0"/>
+      </a:fillRef>
+      <a:effectRef idx="0">
+        <a:scrgbClr r="0" g="0" b="0"/>
+      </a:effectRef>
+      <a:fontRef idx="minor"/>
+    </dgm:style>
+  </dgm:styleLbl>
+  <dgm:styleLbl name="bgShp">
+    <dgm:scene3d>
+      <a:camera prst="orthographicFront"/>
+      <a:lightRig rig="threePt" dir="t"/>
+    </dgm:scene3d>
+    <dgm:sp3d/>
+    <dgm:txPr/>
+    <dgm:style>
+      <a:lnRef idx="0">
+        <a:scrgbClr r="0" g="0" b="0"/>
+      </a:lnRef>
+      <a:fillRef idx="1">
+        <a:scrgbClr r="0" g="0" b="0"/>
+      </a:fillRef>
+      <a:effectRef idx="0">
+        <a:scrgbClr r="0" g="0" b="0"/>
+      </a:effectRef>
+      <a:fontRef idx="minor"/>
+    </dgm:style>
+  </dgm:styleLbl>
+  <dgm:styleLbl name="dkBgShp">
+    <dgm:scene3d>
+      <a:camera prst="orthographicFront"/>
+      <a:lightRig rig="threePt" dir="t"/>
+    </dgm:scene3d>
+    <dgm:sp3d/>
+    <dgm:txPr/>
+    <dgm:style>
+      <a:lnRef idx="0">
+        <a:scrgbClr r="0" g="0" b="0"/>
+      </a:lnRef>
+      <a:fillRef idx="1">
+        <a:scrgbClr r="0" g="0" b="0"/>
+      </a:fillRef>
+      <a:effectRef idx="0">
+        <a:scrgbClr r="0" g="0" b="0"/>
+      </a:effectRef>
+      <a:fontRef idx="minor"/>
+    </dgm:style>
+  </dgm:styleLbl>
+  <dgm:styleLbl name="trBgShp">
+    <dgm:scene3d>
+      <a:camera prst="orthographicFront"/>
+      <a:lightRig rig="threePt" dir="t"/>
+    </dgm:scene3d>
+    <dgm:sp3d/>
+    <dgm:txPr/>
+    <dgm:style>
+      <a:lnRef idx="0">
+        <a:scrgbClr r="0" g="0" b="0"/>
+      </a:lnRef>
+      <a:fillRef idx="1">
+        <a:scrgbClr r="0" g="0" b="0"/>
+      </a:fillRef>
+      <a:effectRef idx="0">
+        <a:scrgbClr r="0" g="0" b="0"/>
+      </a:effectRef>
+      <a:fontRef idx="minor"/>
+    </dgm:style>
+  </dgm:styleLbl>
+  <dgm:styleLbl name="fgShp">
+    <dgm:scene3d>
+      <a:camera prst="orthographicFront"/>
+      <a:lightRig rig="threePt" dir="t"/>
+    </dgm:scene3d>
+    <dgm:sp3d/>
+    <dgm:txPr/>
+    <dgm:style>
+      <a:lnRef idx="2">
+        <a:scrgbClr r="0" g="0" b="0"/>
+      </a:lnRef>
+      <a:fillRef idx="1">
+        <a:scrgbClr r="0" g="0" b="0"/>
+      </a:fillRef>
+      <a:effectRef idx="0">
+        <a:scrgbClr r="0" g="0" b="0"/>
+      </a:effectRef>
+      <a:fontRef idx="minor"/>
+    </dgm:style>
+  </dgm:styleLbl>
+  <dgm:styleLbl name="revTx">
+    <dgm:scene3d>
+      <a:camera prst="orthographicFront"/>
+      <a:lightRig rig="threePt" dir="t"/>
+    </dgm:scene3d>
+    <dgm:sp3d/>
+    <dgm:txPr/>
+    <dgm:style>
+      <a:lnRef idx="0">
+        <a:scrgbClr r="0" g="0" b="0"/>
+      </a:lnRef>
+      <a:fillRef idx="0">
+        <a:scrgbClr r="0" g="0" b="0"/>
+      </a:fillRef>
+      <a:effectRef idx="0">
+        <a:scrgbClr r="0" g="0" b="0"/>
+      </a:effectRef>
+      <a:fontRef idx="minor"/>
+    </dgm:style>
+  </dgm:styleLbl>
+</dgm:styleDef>
+</file>
+
 <file path=ppt/slideLayouts/slideLayout1.xml><?xml version="1.0" encoding="utf-8"?>
 <p:sldLayout xmlns:a="http://schemas.openxmlformats.org/drawingml/2006/main" xmlns:r="http://schemas.openxmlformats.org/officeDocument/2006/relationships" xmlns:p="http://schemas.openxmlformats.org/presentationml/2006/main" type="title" preserve="1">
   <p:cSld name="Title Slide">
@@ -5798,9 +8495,16 @@
 <p:sldMaster xmlns:a="http://schemas.openxmlformats.org/drawingml/2006/main" xmlns:r="http://schemas.openxmlformats.org/officeDocument/2006/relationships" xmlns:p="http://schemas.openxmlformats.org/presentationml/2006/main">
   <p:cSld>
     <p:bg>
-      <p:bgRef idx="1001">
-        <a:schemeClr val="bg1"/>
-      </p:bgRef>
+      <p:bgPr>
+        <a:blipFill dpi="0" rotWithShape="1">
+          <a:blip r:embed="rId13"/>
+          <a:srcRect/>
+          <a:stretch>
+            <a:fillRect t="-6000" b="-6000"/>
+          </a:stretch>
+        </a:blipFill>
+        <a:effectLst/>
+      </p:bgPr>
     </p:bg>
     <p:spTree>
       <p:nvGrpSpPr>
@@ -6360,19 +9064,254 @@
 <file path=ppt/slides/slide1.xml><?xml version="1.0" encoding="utf-8"?>
 <p:sld xmlns:a="http://schemas.openxmlformats.org/drawingml/2006/main" xmlns:r="http://schemas.openxmlformats.org/officeDocument/2006/relationships" xmlns:p="http://schemas.openxmlformats.org/presentationml/2006/main">
   <p:cSld>
-    <p:bg>
-      <p:bgPr>
-        <a:pattFill prst="pct5">
-          <a:fgClr>
-            <a:schemeClr val="accent1"/>
-          </a:fgClr>
-          <a:bgClr>
-            <a:schemeClr val="bg1"/>
-          </a:bgClr>
-        </a:pattFill>
-        <a:effectLst/>
-      </p:bgPr>
-    </p:bg>
+    <p:spTree>
+      <p:nvGrpSpPr>
+        <p:cNvPr id="1" name=""/>
+        <p:cNvGrpSpPr/>
+        <p:nvPr/>
+      </p:nvGrpSpPr>
+      <p:grpSpPr>
+        <a:xfrm>
+          <a:off x="0" y="0"/>
+          <a:ext cx="0" cy="0"/>
+          <a:chOff x="0" y="0"/>
+          <a:chExt cx="0" cy="0"/>
+        </a:xfrm>
+      </p:grpSpPr>
+      <p:sp>
+        <p:nvSpPr>
+          <p:cNvPr id="4" name="Title 3">
+            <a:extLst>
+              <a:ext uri="{FF2B5EF4-FFF2-40B4-BE49-F238E27FC236}">
+                <a16:creationId xmlns:a16="http://schemas.microsoft.com/office/drawing/2014/main" id="{2715F32B-FAC3-A232-6254-45A31C63E58F}"/>
+              </a:ext>
+            </a:extLst>
+          </p:cNvPr>
+          <p:cNvSpPr>
+            <a:spLocks noGrp="1"/>
+          </p:cNvSpPr>
+          <p:nvPr>
+            <p:ph type="title"/>
+          </p:nvPr>
+        </p:nvSpPr>
+        <p:spPr>
+          <a:xfrm>
+            <a:off x="210841" y="21147"/>
+            <a:ext cx="11802787" cy="4830308"/>
+          </a:xfrm>
+        </p:spPr>
+        <p:txBody>
+          <a:bodyPr>
+            <a:normAutofit/>
+          </a:bodyPr>
+          <a:lstStyle/>
+          <a:p>
+            <a:r>
+              <a:rPr lang="en-US" sz="5000" dirty="0" err="1">
+                <a:solidFill>
+                  <a:srgbClr val="0070C0"/>
+                </a:solidFill>
+                <a:latin typeface="Century Schoolbook"/>
+              </a:rPr>
+              <a:t>EmporiUm</a:t>
+            </a:r>
+            <a:r>
+              <a:rPr lang="en-US" sz="5000" dirty="0">
+                <a:solidFill>
+                  <a:srgbClr val="0070C0"/>
+                </a:solidFill>
+                <a:latin typeface="Century Schoolbook"/>
+              </a:rPr>
+              <a:t> Sales</a:t>
+            </a:r>
+            <a:br>
+              <a:rPr lang="en-US" sz="5000" dirty="0">
+                <a:latin typeface="Century Schoolbook"/>
+              </a:rPr>
+            </a:br>
+            <a:r>
+              <a:rPr lang="en-US" sz="5000" dirty="0">
+                <a:solidFill>
+                  <a:srgbClr val="0070C0"/>
+                </a:solidFill>
+                <a:latin typeface="Century Schoolbook"/>
+              </a:rPr>
+              <a:t>Analysis with Power BI</a:t>
+            </a:r>
+          </a:p>
+          <a:p>
+            <a:r>
+              <a:rPr lang="en-US" sz="5000">
+                <a:solidFill>
+                  <a:srgbClr val="0070C0"/>
+                </a:solidFill>
+                <a:latin typeface="Century Schoolbook"/>
+              </a:rPr>
+              <a:t>West Region</a:t>
+            </a:r>
+            <a:endParaRPr lang="en-US" sz="5000" dirty="0">
+              <a:solidFill>
+                <a:srgbClr val="0070C0"/>
+              </a:solidFill>
+              <a:latin typeface="Century Schoolbook"/>
+            </a:endParaRPr>
+          </a:p>
+          <a:p>
+            <a:endParaRPr lang="en-US" sz="5000" dirty="0">
+              <a:solidFill>
+                <a:srgbClr val="0070C0"/>
+              </a:solidFill>
+              <a:highlight>
+                <a:srgbClr val="00FF00"/>
+              </a:highlight>
+              <a:latin typeface="Kristen ITC"/>
+            </a:endParaRPr>
+          </a:p>
+        </p:txBody>
+      </p:sp>
+      <p:sp>
+        <p:nvSpPr>
+          <p:cNvPr id="5" name="Subtitle 4">
+            <a:extLst>
+              <a:ext uri="{FF2B5EF4-FFF2-40B4-BE49-F238E27FC236}">
+                <a16:creationId xmlns:a16="http://schemas.microsoft.com/office/drawing/2014/main" id="{38885C28-5C1E-79B0-3BAD-AA263462BBB5}"/>
+              </a:ext>
+            </a:extLst>
+          </p:cNvPr>
+          <p:cNvSpPr>
+            <a:spLocks noGrp="1"/>
+          </p:cNvSpPr>
+          <p:nvPr>
+            <p:ph idx="1"/>
+          </p:nvPr>
+        </p:nvSpPr>
+        <p:spPr>
+          <a:xfrm>
+            <a:off x="9730334" y="234640"/>
+            <a:ext cx="2085788" cy="583610"/>
+          </a:xfrm>
+        </p:spPr>
+        <p:txBody>
+          <a:bodyPr vert="horz" lIns="91440" tIns="45720" rIns="91440" bIns="45720" rtlCol="0" anchor="t">
+            <a:normAutofit fontScale="70000" lnSpcReduction="20000"/>
+          </a:bodyPr>
+          <a:lstStyle/>
+          <a:p>
+            <a:r>
+              <a:rPr lang="en-US" sz="2200" b="1">
+                <a:solidFill>
+                  <a:srgbClr val="0070C0"/>
+                </a:solidFill>
+                <a:latin typeface="Century Schoolbook"/>
+              </a:rPr>
+              <a:t>Ndifon Caleb Ndakina</a:t>
+            </a:r>
+          </a:p>
+        </p:txBody>
+      </p:sp>
+      <p:sp>
+        <p:nvSpPr>
+          <p:cNvPr id="2" name="Text Placeholder 1">
+            <a:extLst>
+              <a:ext uri="{FF2B5EF4-FFF2-40B4-BE49-F238E27FC236}">
+                <a16:creationId xmlns:a16="http://schemas.microsoft.com/office/drawing/2014/main" id="{29F7E19A-D256-60BA-96D5-48050BEE5A3E}"/>
+              </a:ext>
+            </a:extLst>
+          </p:cNvPr>
+          <p:cNvSpPr>
+            <a:spLocks noGrp="1"/>
+          </p:cNvSpPr>
+          <p:nvPr>
+            <p:ph type="body" sz="half" idx="2"/>
+          </p:nvPr>
+        </p:nvSpPr>
+        <p:spPr>
+          <a:xfrm>
+            <a:off x="7122848" y="4861754"/>
+            <a:ext cx="4861246" cy="1780773"/>
+          </a:xfrm>
+        </p:spPr>
+        <p:txBody>
+          <a:bodyPr>
+            <a:normAutofit fontScale="77500" lnSpcReduction="20000"/>
+          </a:bodyPr>
+          <a:lstStyle/>
+          <a:p>
+            <a:r>
+              <a:rPr lang="en-US" sz="3600">
+                <a:solidFill>
+                  <a:srgbClr val="0070C0"/>
+                </a:solidFill>
+                <a:latin typeface="Fairwater Script"/>
+              </a:rPr>
+              <a:t>                              Colorado</a:t>
+            </a:r>
+          </a:p>
+          <a:p>
+            <a:endParaRPr lang="en-US" sz="3600" dirty="0">
+              <a:solidFill>
+                <a:srgbClr val="92D050"/>
+              </a:solidFill>
+              <a:latin typeface="Fairwater Script"/>
+              <a:ea typeface="Calibri"/>
+              <a:cs typeface="Calibri"/>
+            </a:endParaRPr>
+          </a:p>
+          <a:p>
+            <a:r>
+              <a:rPr lang="en-US" sz="3600" dirty="0">
+                <a:solidFill>
+                  <a:srgbClr val="92D050"/>
+                </a:solidFill>
+                <a:latin typeface="Fairwater Script"/>
+                <a:ea typeface="Calibri"/>
+                <a:cs typeface="Calibri"/>
+              </a:rPr>
+              <a:t>                              </a:t>
+            </a:r>
+            <a:r>
+              <a:rPr lang="en-US" sz="3600">
+                <a:solidFill>
+                  <a:srgbClr val="0070C0"/>
+                </a:solidFill>
+                <a:latin typeface="Fairwater Script"/>
+                <a:ea typeface="Calibri"/>
+                <a:cs typeface="Calibri"/>
+              </a:rPr>
+              <a:t>Jim Heck</a:t>
+            </a:r>
+            <a:r>
+              <a:rPr lang="en-US" sz="3600" dirty="0">
+                <a:solidFill>
+                  <a:schemeClr val="accent6">
+                    <a:lumMod val="49000"/>
+                  </a:schemeClr>
+                </a:solidFill>
+                <a:latin typeface="Fairwater Script"/>
+                <a:ea typeface="Calibri"/>
+                <a:cs typeface="Calibri"/>
+              </a:rPr>
+              <a:t> </a:t>
+            </a:r>
+          </a:p>
+        </p:txBody>
+      </p:sp>
+    </p:spTree>
+    <p:extLst>
+      <p:ext uri="{BB962C8B-B14F-4D97-AF65-F5344CB8AC3E}">
+        <p14:creationId xmlns:p14="http://schemas.microsoft.com/office/powerpoint/2010/main" val="109857222"/>
+      </p:ext>
+    </p:extLst>
+  </p:cSld>
+  <p:clrMapOvr>
+    <a:overrideClrMapping bg1="dk1" tx1="lt1" bg2="dk2" tx2="lt2" accent1="accent1" accent2="accent2" accent3="accent3" accent4="accent4" accent5="accent5" accent6="accent6" hlink="hlink" folHlink="folHlink"/>
+  </p:clrMapOvr>
+</p:sld>
+</file>
+
+<file path=ppt/slides/slide10.xml><?xml version="1.0" encoding="utf-8"?>
+<p:sld xmlns:a="http://schemas.openxmlformats.org/drawingml/2006/main" xmlns:r="http://schemas.openxmlformats.org/officeDocument/2006/relationships" xmlns:p="http://schemas.openxmlformats.org/presentationml/2006/main">
+  <p:cSld>
     <p:spTree>
       <p:nvGrpSpPr>
         <p:cNvPr id="1" name=""/>
@@ -6389,10 +9328,10 @@
       </p:grpSpPr>
       <p:sp useBgFill="1">
         <p:nvSpPr>
-          <p:cNvPr id="20" name="Rectangle 19">
+          <p:cNvPr id="24" name="Rectangle 23">
             <a:extLst>
               <a:ext uri="{FF2B5EF4-FFF2-40B4-BE49-F238E27FC236}">
-                <a16:creationId xmlns:a16="http://schemas.microsoft.com/office/drawing/2014/main" id="{7A875D55-4A80-43E9-38F6-27E3664939B0}"/>
+                <a16:creationId xmlns:a16="http://schemas.microsoft.com/office/drawing/2014/main" id="{9B65F7F7-2FCE-8F01-53DE-15C39342BE99}"/>
               </a:ext>
               <a:ext uri="{C183D7F6-B498-43B3-948B-1728B52AA6E4}">
                 <adec:decorative xmlns:adec="http://schemas.microsoft.com/office/drawing/2017/decorative" val="1"/>
@@ -6463,45 +9402,12 @@
           </a:p>
         </p:txBody>
       </p:sp>
-      <p:pic>
-        <p:nvPicPr>
-          <p:cNvPr id="7" name="Picture 6" descr="A blue and purple lights&#10;&#10;AI-generated content may be incorrect.">
+      <p:sp>
+        <p:nvSpPr>
+          <p:cNvPr id="2" name="Title 1">
             <a:extLst>
               <a:ext uri="{FF2B5EF4-FFF2-40B4-BE49-F238E27FC236}">
-                <a16:creationId xmlns:a16="http://schemas.microsoft.com/office/drawing/2014/main" id="{FF148D15-F15A-ECAF-DA88-1E2689C2F7D3}"/>
-              </a:ext>
-            </a:extLst>
-          </p:cNvPr>
-          <p:cNvPicPr>
-            <a:picLocks noChangeAspect="1"/>
-          </p:cNvPicPr>
-          <p:nvPr/>
-        </p:nvPicPr>
-        <p:blipFill>
-          <a:blip r:embed="rId2">
-            <a:alphaModFix amt="60000"/>
-          </a:blip>
-          <a:srcRect l="11111"/>
-          <a:stretch>
-            <a:fillRect/>
-          </a:stretch>
-        </p:blipFill>
-        <p:spPr>
-          <a:xfrm>
-            <a:off x="1" y="1"/>
-            <a:ext cx="12192000" cy="6857999"/>
-          </a:xfrm>
-          <a:prstGeom prst="rect">
-            <a:avLst/>
-          </a:prstGeom>
-        </p:spPr>
-      </p:pic>
-      <p:sp>
-        <p:nvSpPr>
-          <p:cNvPr id="4" name="Title 3">
-            <a:extLst>
-              <a:ext uri="{FF2B5EF4-FFF2-40B4-BE49-F238E27FC236}">
-                <a16:creationId xmlns:a16="http://schemas.microsoft.com/office/drawing/2014/main" id="{2715F32B-FAC3-A232-6254-45A31C63E58F}"/>
+                <a16:creationId xmlns:a16="http://schemas.microsoft.com/office/drawing/2014/main" id="{E0CCC684-44D2-C0FE-9E76-492D846D50DE}"/>
               </a:ext>
             </a:extLst>
           </p:cNvPr>
@@ -6509,117 +9415,64 @@
             <a:spLocks noGrp="1"/>
           </p:cNvSpPr>
           <p:nvPr>
-            <p:ph type="ctrTitle"/>
+            <p:ph type="title"/>
           </p:nvPr>
         </p:nvSpPr>
         <p:spPr>
           <a:xfrm>
-            <a:off x="2301923" y="648031"/>
-            <a:ext cx="7588155" cy="3070835"/>
+            <a:off x="1731821" y="501345"/>
+            <a:ext cx="8728364" cy="689279"/>
           </a:xfrm>
         </p:spPr>
         <p:txBody>
-          <a:bodyPr>
+          <a:bodyPr vert="horz" lIns="91440" tIns="45720" rIns="91440" bIns="45720" rtlCol="0" anchor="b">
             <a:normAutofit/>
           </a:bodyPr>
           <a:lstStyle/>
           <a:p>
+            <a:pPr algn="ctr"/>
             <a:r>
-              <a:rPr lang="en-US" sz="5000" err="1">
-                <a:solidFill>
-                  <a:srgbClr val="FFFFFF"/>
-                </a:solidFill>
-              </a:rPr>
-              <a:t>EmporiUm</a:t>
+              <a:rPr lang="en-US"/>
+              <a:t>Git hub Repository</a:t>
             </a:r>
-            <a:r>
-              <a:rPr lang="en-US" sz="5000">
-                <a:solidFill>
-                  <a:srgbClr val="FFFFFF"/>
-                </a:solidFill>
-              </a:rPr>
-              <a:t> Sales</a:t>
-            </a:r>
-            <a:br>
-              <a:rPr lang="en-US" sz="5000"/>
-            </a:br>
-            <a:r>
-              <a:rPr lang="en-US" sz="5000">
-                <a:solidFill>
-                  <a:srgbClr val="FFFFFF"/>
-                </a:solidFill>
-              </a:rPr>
-              <a:t>Analysis with Power BI</a:t>
-            </a:r>
-          </a:p>
-          <a:p>
-            <a:r>
-              <a:rPr lang="en-US" sz="5000">
-                <a:solidFill>
-                  <a:srgbClr val="FFFFFF"/>
-                </a:solidFill>
-              </a:rPr>
-              <a:t>West Region</a:t>
-            </a:r>
-            <a:endParaRPr lang="en-US" sz="5000"/>
-          </a:p>
-          <a:p>
-            <a:endParaRPr lang="en-US" sz="5000">
-              <a:solidFill>
-                <a:srgbClr val="FFFFFF"/>
-              </a:solidFill>
-            </a:endParaRPr>
           </a:p>
         </p:txBody>
       </p:sp>
-      <p:sp>
-        <p:nvSpPr>
-          <p:cNvPr id="5" name="Subtitle 4">
+      <p:graphicFrame>
+        <p:nvGraphicFramePr>
+          <p:cNvPr id="5" name="Content Placeholder 2">
             <a:extLst>
               <a:ext uri="{FF2B5EF4-FFF2-40B4-BE49-F238E27FC236}">
-                <a16:creationId xmlns:a16="http://schemas.microsoft.com/office/drawing/2014/main" id="{38885C28-5C1E-79B0-3BAD-AA263462BBB5}"/>
+                <a16:creationId xmlns:a16="http://schemas.microsoft.com/office/drawing/2014/main" id="{4EC9BE1A-80EC-7A3D-7D33-F52BB11B2E48}"/>
               </a:ext>
             </a:extLst>
           </p:cNvPr>
-          <p:cNvSpPr>
-            <a:spLocks noGrp="1"/>
-          </p:cNvSpPr>
+          <p:cNvGraphicFramePr>
+            <a:graphicFrameLocks noGrp="1"/>
+          </p:cNvGraphicFramePr>
           <p:nvPr>
-            <p:ph type="subTitle" idx="1"/>
+            <p:ph idx="1"/>
           </p:nvPr>
-        </p:nvSpPr>
-        <p:spPr>
-          <a:xfrm>
-            <a:off x="2301923" y="4838966"/>
-            <a:ext cx="7588155" cy="884319"/>
-          </a:xfrm>
-        </p:spPr>
-        <p:txBody>
-          <a:bodyPr vert="horz" lIns="91440" tIns="45720" rIns="91440" bIns="45720" rtlCol="0">
-            <a:normAutofit/>
-          </a:bodyPr>
-          <a:lstStyle/>
-          <a:p>
-            <a:r>
-              <a:rPr lang="en-US" sz="2200" b="1">
-                <a:solidFill>
-                  <a:srgbClr val="FFFFFF"/>
-                </a:solidFill>
-              </a:rPr>
-              <a:t>Ndifon Caleb Ndakina</a:t>
-            </a:r>
-          </a:p>
-        </p:txBody>
-      </p:sp>
+        </p:nvGraphicFramePr>
+        <p:xfrm>
+          <a:off x="612647" y="1715532"/>
+          <a:ext cx="10653579" cy="4593828"/>
+        </p:xfrm>
+        <a:graphic>
+          <a:graphicData uri="http://schemas.openxmlformats.org/drawingml/2006/diagram">
+            <dgm:relIds xmlns:dgm="http://schemas.openxmlformats.org/drawingml/2006/diagram" xmlns:r="http://schemas.openxmlformats.org/officeDocument/2006/relationships" r:dm="rId2" r:lo="rId3" r:qs="rId4" r:cs="rId5"/>
+          </a:graphicData>
+        </a:graphic>
+      </p:graphicFrame>
     </p:spTree>
     <p:extLst>
       <p:ext uri="{BB962C8B-B14F-4D97-AF65-F5344CB8AC3E}">
-        <p14:creationId xmlns:p14="http://schemas.microsoft.com/office/powerpoint/2010/main" val="109857222"/>
+        <p14:creationId xmlns:p14="http://schemas.microsoft.com/office/powerpoint/2010/main" val="4088217422"/>
       </p:ext>
     </p:extLst>
   </p:cSld>
   <p:clrMapOvr>
-    <a:overrideClrMapping bg1="dk1" tx1="lt1" bg2="dk2" tx2="lt2" accent1="accent1" accent2="accent2" accent3="accent3" accent4="accent4" accent5="accent5" accent6="accent6" hlink="hlink" folHlink="folHlink"/>
+    <a:masterClrMapping/>
   </p:clrMapOvr>
 </p:sld>
 </file>
@@ -6627,17 +9480,6 @@
 <file path=ppt/slides/slide2.xml><?xml version="1.0" encoding="utf-8"?>
 <p:sld xmlns:a="http://schemas.openxmlformats.org/drawingml/2006/main" xmlns:r="http://schemas.openxmlformats.org/officeDocument/2006/relationships" xmlns:p="http://schemas.openxmlformats.org/presentationml/2006/main">
   <p:cSld>
-    <p:bg>
-      <p:bgPr>
-        <a:blipFill>
-          <a:blip r:embed="rId2"/>
-          <a:stretch>
-            <a:fillRect/>
-          </a:stretch>
-        </a:blipFill>
-        <a:effectLst/>
-      </p:bgPr>
-    </p:bg>
     <p:spTree>
       <p:nvGrpSpPr>
         <p:cNvPr id="1" name=""/>
@@ -6757,17 +9599,6 @@
 <file path=ppt/slides/slide3.xml><?xml version="1.0" encoding="utf-8"?>
 <p:sld xmlns:a="http://schemas.openxmlformats.org/drawingml/2006/main" xmlns:r="http://schemas.openxmlformats.org/officeDocument/2006/relationships" xmlns:p="http://schemas.openxmlformats.org/presentationml/2006/main">
   <p:cSld>
-    <p:bg>
-      <p:bgPr>
-        <a:blipFill>
-          <a:blip r:embed="rId2"/>
-          <a:stretch>
-            <a:fillRect/>
-          </a:stretch>
-        </a:blipFill>
-        <a:effectLst/>
-      </p:bgPr>
-    </p:bg>
     <p:spTree>
       <p:nvGrpSpPr>
         <p:cNvPr id="1" name=""/>
@@ -6975,17 +9806,6 @@
 <file path=ppt/slides/slide4.xml><?xml version="1.0" encoding="utf-8"?>
 <p:sld xmlns:a="http://schemas.openxmlformats.org/drawingml/2006/main" xmlns:r="http://schemas.openxmlformats.org/officeDocument/2006/relationships" xmlns:p="http://schemas.openxmlformats.org/presentationml/2006/main">
   <p:cSld>
-    <p:bg>
-      <p:bgPr>
-        <a:blipFill>
-          <a:blip r:embed="rId2"/>
-          <a:stretch>
-            <a:fillRect/>
-          </a:stretch>
-        </a:blipFill>
-        <a:effectLst/>
-      </p:bgPr>
-    </p:bg>
     <p:spTree>
       <p:nvGrpSpPr>
         <p:cNvPr id="1" name=""/>
@@ -8455,11 +11275,15 @@
         </p:spPr>
         <p:txBody>
           <a:bodyPr>
-            <a:normAutofit/>
+            <a:normAutofit fontScale="90000"/>
           </a:bodyPr>
           <a:lstStyle/>
           <a:p>
-            <a:endParaRPr lang="en-US"/>
+            <a:r>
+              <a:rPr lang="en-US"/>
+              <a:t>Comparing total revenue by store and top five product categories</a:t>
+            </a:r>
+            <a:endParaRPr lang="en-US" dirty="0"/>
           </a:p>
         </p:txBody>
       </p:sp>
@@ -8479,14 +11303,14 @@
             <p:ph sz="half" idx="1"/>
             <p:extLst>
               <p:ext uri="{D42A27DB-BD31-4B8C-83A1-F6EECF244321}">
-                <p14:modId xmlns:p14="http://schemas.microsoft.com/office/powerpoint/2010/main" val="1785888426"/>
+                <p14:modId xmlns:p14="http://schemas.microsoft.com/office/powerpoint/2010/main" val="1692385523"/>
               </p:ext>
             </p:extLst>
           </p:nvPr>
         </p:nvGraphicFramePr>
         <p:xfrm>
-          <a:off x="94342" y="762000"/>
-          <a:ext cx="4569572" cy="6230300"/>
+          <a:off x="94511" y="1015999"/>
+          <a:ext cx="4569572" cy="5961679"/>
         </p:xfrm>
         <a:graphic>
           <a:graphicData uri="http://schemas.openxmlformats.org/drawingml/2006/table">
@@ -8503,7 +11327,7 @@
                   </a:extLst>
                 </a:gridCol>
               </a:tblGrid>
-              <a:tr h="850604">
+              <a:tr h="826479">
                 <a:tc>
                   <a:txBody>
                     <a:bodyPr/>
@@ -8592,7 +11416,7 @@
                         <a:t>$0.92M</a:t>
                       </a:r>
                       <a:r>
-                        <a:rPr lang="en-US" sz="1600" b="0" i="0" u="none" strike="noStrike" noProof="0">
+                        <a:rPr lang="en-US" sz="1600" b="0" i="0" u="none" strike="noStrike" noProof="0" dirty="0">
                           <a:solidFill>
                             <a:schemeClr val="tx1">
                               <a:lumMod val="95000"/>
@@ -8655,7 +11479,7 @@
                         <a:t>$0.64M</a:t>
                       </a:r>
                       <a:r>
-                        <a:rPr lang="en-US" sz="1600" b="0" i="0" u="none" strike="noStrike" noProof="0">
+                        <a:rPr lang="en-US" sz="1600" b="0" i="0" u="none" strike="noStrike" noProof="0" dirty="0">
                           <a:solidFill>
                             <a:schemeClr val="tx1">
                               <a:lumMod val="95000"/>
@@ -8676,7 +11500,7 @@
                   </a:ext>
                 </a:extLst>
               </a:tr>
-              <a:tr h="1023892">
+              <a:tr h="1056057">
                 <a:tc>
                   <a:txBody>
                     <a:bodyPr/>
@@ -8711,7 +11535,7 @@
                   </a:ext>
                 </a:extLst>
               </a:tr>
-              <a:tr h="850604">
+              <a:tr h="826479">
                 <a:tc>
                   <a:txBody>
                     <a:bodyPr/>
@@ -8768,12 +11592,12 @@
                         <a:t>$0.28M</a:t>
                       </a:r>
                       <a:r>
-                        <a:rPr lang="en-US" sz="1600" b="0" i="0" u="none" strike="noStrike" noProof="0">
+                        <a:rPr lang="en-US" sz="1600" b="0" i="0" u="none" strike="noStrike" noProof="0" dirty="0">
                           <a:latin typeface="Neue Haas Grotesk Text Pro"/>
                         </a:rPr>
                         <a:t> </a:t>
                       </a:r>
-                      <a:endParaRPr lang="en-US" sz="1600"/>
+                      <a:endParaRPr lang="en-US" sz="1600" dirty="0"/>
                     </a:p>
                     <a:p>
                       <a:pPr marL="285750" lvl="0" indent="-285750" algn="l">
@@ -8808,7 +11632,7 @@
                         <a:t>$0.28M</a:t>
                       </a:r>
                       <a:r>
-                        <a:rPr lang="en-US" sz="1600" b="0" i="0" u="none" strike="noStrike" noProof="0">
+                        <a:rPr lang="en-US" sz="1600" b="0" i="0" u="none" strike="noStrike" noProof="0" dirty="0">
                           <a:latin typeface="Neue Haas Grotesk Text Pro"/>
                         </a:rPr>
                         <a:t> </a:t>
@@ -8823,7 +11647,7 @@
                   </a:ext>
                 </a:extLst>
               </a:tr>
-              <a:tr h="1023892">
+              <a:tr h="1056057">
                 <a:tc>
                   <a:txBody>
                     <a:bodyPr/>
@@ -8858,7 +11682,7 @@
                   </a:ext>
                 </a:extLst>
               </a:tr>
-              <a:tr h="1023892">
+              <a:tr h="1101972">
                 <a:tc>
                   <a:txBody>
                     <a:bodyPr/>
@@ -8936,7 +11760,7 @@
                   </a:ext>
                 </a:extLst>
               </a:tr>
-              <a:tr h="1023892">
+              <a:tr h="803521">
                 <a:tc>
                   <a:txBody>
                     <a:bodyPr/>
@@ -8992,12 +11816,12 @@
                         <a:t>2025 Sales:</a:t>
                       </a:r>
                       <a:r>
-                        <a:rPr lang="en-US" sz="1600" b="0" i="0" u="none" strike="noStrike" noProof="0">
+                        <a:rPr lang="en-US" sz="1600" b="0" i="0" u="none" strike="noStrike" noProof="0" dirty="0">
                           <a:latin typeface="Neue Haas Grotesk Text Pro"/>
                         </a:rPr>
                         <a:t> </a:t>
                       </a:r>
-                      <a:endParaRPr lang="en-US" sz="1600" b="1" i="0" u="none" strike="noStrike" noProof="0">
+                      <a:endParaRPr lang="en-US" sz="1600" b="1" i="0" u="none" strike="noStrike" noProof="0" dirty="0">
                         <a:latin typeface="Neue Haas Grotesk Text Pro"/>
                       </a:endParaRPr>
                     </a:p>
@@ -9038,8 +11862,8 @@
         </p:blipFill>
         <p:spPr>
           <a:xfrm>
-            <a:off x="4958907" y="708780"/>
-            <a:ext cx="7228114" cy="6149598"/>
+            <a:off x="4958907" y="1035351"/>
+            <a:ext cx="7228114" cy="5823027"/>
           </a:xfrm>
           <a:prstGeom prst="rect">
             <a:avLst/>
@@ -9189,8 +12013,8 @@
           <a:noFill/>
         </p:spPr>
       </p:pic>
-      <mc:AlternateContent xmlns:mc="http://schemas.openxmlformats.org/markup-compatibility/2006">
-        <mc:Choice xmlns:we="http://schemas.microsoft.com/office/webextensions/webextension/2010/11" xmlns:pca="http://schemas.microsoft.com/office/powerpoint/2013/contentapp" Requires="we pca">
+      <mc:AlternateContent xmlns:mc="http://schemas.openxmlformats.org/markup-compatibility/2006" xmlns:we="http://schemas.microsoft.com/office/webextensions/webextension/2010/11" xmlns:pca="http://schemas.microsoft.com/office/powerpoint/2013/contentapp">
+        <mc:Choice Requires="we pca">
           <p:graphicFrame>
             <p:nvGraphicFramePr>
               <p:cNvPr id="2" name="Add-in" descr="Add-in content for Microsoft Power BI."/>
@@ -9210,7 +12034,7 @@
             </a:graphic>
           </p:graphicFrame>
         </mc:Choice>
-        <mc:Fallback>
+        <mc:Fallback xmlns="">
           <p:pic>
             <p:nvPicPr>
               <p:cNvPr id="2" name="Add-in" descr="Add-in content for Microsoft Power BI."/>
@@ -9280,10 +12104,89 @@
       </p:grpSpPr>
       <p:sp>
         <p:nvSpPr>
+          <p:cNvPr id="9" name="Rectangle 8">
+            <a:extLst>
+              <a:ext uri="{FF2B5EF4-FFF2-40B4-BE49-F238E27FC236}">
+                <a16:creationId xmlns:a16="http://schemas.microsoft.com/office/drawing/2014/main" id="{01A22726-DA03-BCB0-F12E-98258FB7E5C0}"/>
+              </a:ext>
+              <a:ext uri="{C183D7F6-B498-43B3-948B-1728B52AA6E4}">
+                <adec:decorative xmlns:adec="http://schemas.microsoft.com/office/drawing/2017/decorative" val="1"/>
+              </a:ext>
+            </a:extLst>
+          </p:cNvPr>
+          <p:cNvSpPr>
+            <a:spLocks noGrp="1" noRot="1" noChangeAspect="1" noMove="1" noResize="1" noEditPoints="1" noAdjustHandles="1" noChangeArrowheads="1" noChangeShapeType="1" noTextEdit="1"/>
+          </p:cNvSpPr>
+          <p:nvPr>
+            <p:extLst>
+              <p:ext uri="{386F3935-93C4-4BCD-93E2-E3B085C9AB24}">
+                <p16:designElem xmlns:p16="http://schemas.microsoft.com/office/powerpoint/2015/main" val="1"/>
+              </p:ext>
+            </p:extLst>
+          </p:nvPr>
+        </p:nvSpPr>
+        <p:spPr>
+          <a:xfrm>
+            <a:off x="0" y="0"/>
+            <a:ext cx="12192000" cy="6858000"/>
+          </a:xfrm>
+          <a:prstGeom prst="rect">
+            <a:avLst/>
+          </a:prstGeom>
+          <a:solidFill>
+            <a:schemeClr val="bg1"/>
+          </a:solidFill>
+          <a:ln w="12700" cap="flat" cmpd="sng" algn="ctr">
+            <a:noFill/>
+            <a:prstDash val="solid"/>
+            <a:miter lim="800000"/>
+          </a:ln>
+          <a:effectLst/>
+          <a:extLst>
+            <a:ext uri="{91240B29-F687-4F45-9708-019B960494DF}">
+              <a14:hiddenLine xmlns:a14="http://schemas.microsoft.com/office/drawing/2010/main" w="12700" cap="flat" cmpd="sng" algn="ctr">
+                <a:solidFill>
+                  <a:schemeClr val="accent1">
+                    <a:shade val="15000"/>
+                  </a:schemeClr>
+                </a:solidFill>
+                <a:prstDash val="solid"/>
+                <a:miter lim="800000"/>
+              </a14:hiddenLine>
+            </a:ext>
+          </a:extLst>
+        </p:spPr>
+        <p:style>
+          <a:lnRef idx="2">
+            <a:schemeClr val="accent1">
+              <a:shade val="15000"/>
+            </a:schemeClr>
+          </a:lnRef>
+          <a:fillRef idx="1">
+            <a:schemeClr val="accent1"/>
+          </a:fillRef>
+          <a:effectRef idx="0">
+            <a:schemeClr val="accent1"/>
+          </a:effectRef>
+          <a:fontRef idx="minor">
+            <a:schemeClr val="lt1"/>
+          </a:fontRef>
+        </p:style>
+        <p:txBody>
+          <a:bodyPr rtlCol="0" anchor="ctr"/>
+          <a:lstStyle/>
+          <a:p>
+            <a:pPr algn="ctr"/>
+            <a:endParaRPr lang="en-US"/>
+          </a:p>
+        </p:txBody>
+      </p:sp>
+      <p:sp>
+        <p:nvSpPr>
           <p:cNvPr id="2" name="Title 1">
             <a:extLst>
               <a:ext uri="{FF2B5EF4-FFF2-40B4-BE49-F238E27FC236}">
-                <a16:creationId xmlns:a16="http://schemas.microsoft.com/office/drawing/2014/main" id="{E0CCC684-44D2-C0FE-9E76-492D846D50DE}"/>
+                <a16:creationId xmlns:a16="http://schemas.microsoft.com/office/drawing/2014/main" id="{5341278F-376A-0C81-1616-625EDF8D628C}"/>
               </a:ext>
             </a:extLst>
           </p:cNvPr>
@@ -9294,24 +12197,32 @@
             <p:ph type="title"/>
           </p:nvPr>
         </p:nvSpPr>
-        <p:spPr/>
+        <p:spPr>
+          <a:xfrm>
+            <a:off x="1524000" y="548640"/>
+            <a:ext cx="9160475" cy="1132258"/>
+          </a:xfrm>
+        </p:spPr>
         <p:txBody>
-          <a:bodyPr/>
+          <a:bodyPr anchor="ctr">
+            <a:normAutofit/>
+          </a:bodyPr>
           <a:lstStyle/>
           <a:p>
+            <a:pPr algn="ctr"/>
             <a:r>
               <a:rPr lang="en-US"/>
-              <a:t>Git hub Repository</a:t>
+              <a:t>Recommendations for future growth</a:t>
             </a:r>
           </a:p>
         </p:txBody>
       </p:sp>
       <p:graphicFrame>
         <p:nvGraphicFramePr>
-          <p:cNvPr id="5" name="Content Placeholder 2">
+          <p:cNvPr id="7" name="Content Placeholder 2">
             <a:extLst>
               <a:ext uri="{FF2B5EF4-FFF2-40B4-BE49-F238E27FC236}">
-                <a16:creationId xmlns:a16="http://schemas.microsoft.com/office/drawing/2014/main" id="{4EC9BE1A-80EC-7A3D-7D33-F52BB11B2E48}"/>
+                <a16:creationId xmlns:a16="http://schemas.microsoft.com/office/drawing/2014/main" id="{D6169E55-4D80-9946-75E7-8AC537BFD878}"/>
               </a:ext>
             </a:extLst>
           </p:cNvPr>
@@ -9320,11 +12231,16 @@
           </p:cNvGraphicFramePr>
           <p:nvPr>
             <p:ph idx="1"/>
+            <p:extLst>
+              <p:ext uri="{D42A27DB-BD31-4B8C-83A1-F6EECF244321}">
+                <p14:modId xmlns:p14="http://schemas.microsoft.com/office/powerpoint/2010/main" val="1267993268"/>
+              </p:ext>
+            </p:extLst>
           </p:nvPr>
         </p:nvGraphicFramePr>
         <p:xfrm>
-          <a:off x="612647" y="1715532"/>
-          <a:ext cx="10653579" cy="4593828"/>
+          <a:off x="930876" y="2037806"/>
+          <a:ext cx="10335350" cy="4066431"/>
         </p:xfrm>
         <a:graphic>
           <a:graphicData uri="http://schemas.openxmlformats.org/drawingml/2006/diagram">
@@ -9335,7 +12251,7 @@
     </p:spTree>
     <p:extLst>
       <p:ext uri="{BB962C8B-B14F-4D97-AF65-F5344CB8AC3E}">
-        <p14:creationId xmlns:p14="http://schemas.microsoft.com/office/powerpoint/2010/main" val="4088217422"/>
+        <p14:creationId xmlns:p14="http://schemas.microsoft.com/office/powerpoint/2010/main" val="3963009552"/>
       </p:ext>
     </p:extLst>
   </p:cSld>
@@ -9554,7 +12470,7 @@
     <we:property name="Microsoft.Office.CampaignId" value="&quot;none&quot;"/>
     <we:property name="artifactViewState" value="&quot;live&quot;"/>
     <we:property name="backgroundColor" value="&quot;#B3B3B3&quot;"/>
-    <we:property name="bookmark" value="&quot;H4sIAAAAAAAAA+1abW/bNhD+K4a+9EsS8EWiyH5r0xQblm5dE6QYhmI4kidHrSx5kpzFC/zfR1J24jR+S5t0eTEQOPYdRd495D13J+kisnkzLGD8Kwwwehm9rqovA6i/9Gi0E5WdTJEMMkNipAkx1KKhijhtNWzzqmyilxdRC3Uf25O8GUHhJ3LCPz/tRFAU76Hvf2VQNLgTDbFuqhKK/F/sBjtVW49wshPh+bCoavBTHrXQop/2zA13v50JdI+7FcG0+RkeoWk7qUkkECk5JyA5ZVYg84Y13YBg2cIhfuqw/H5VtpCXbhkvS6yUBg1hksRaKktYmnp5lhftdIgeH5wPa+fdxQwcKiTNJOOaAGFacWDUQ9eOh177yp5BadBGwcEam86fi+inHGuozen4EM+w8JKDxfqbqvd15XBsxydQ5x1e1ag2eHNgJ/+AWVCVbd662aI3DtwmmjjIp1t+OY8zcjb3dFwYNmdKEPauBF49dcCput+n1T/7NbpxNnpJJzuXQCFwHttUCIuEmCRGkpAroPbdBf2qzg0UTtgh7s0+mR0BthO9ratBgH5q+MCNvHTrHZTuqA2wbHvHCF51HGYmE3cQP55ijeFSt+M2b6cA/VxeB62ZDilGg3INnDPMnRHe6TncPmDfXzDx655AMQrB4KY9zJ1LELY6iN3QFx+xaV/4oZ8m7mPy9SHZyJKlCCyza/kWSZ0gYkoopEZxzlAv36KnfpzfOWo4vYEWuY6WFjEHzUgcWwJKSfFc0fp9BLWP2FV4EWWMsaliIuGEMP+PP0um/APhJlLzcQiY2owbjCmnUiUClN4EqVf9fo19mLHbwXdwyVFb1dg7gmIKwJy3Xth7NahGZRtUb0flNB+TVbufaUMTplLtuF9yKYlLlD/Wp9/KwqX65U41veOqddG6xqmwUevMvjO0F54VEnJFk5f9YlpHXZU0XdaLvKv7py4ofaGmP7uKyNcvk1kN5Vb4PFclTclqvHn+u43tTzGGrwjPp+6dyMSSx+iqZG1cIZgYzZGvrR0N4QlmOjXMagquLEoo25ZED6okyjjESaq5JZq5XXJNUPyDqfgeaGtVbXI745wtduS55SvDLgllYUp4hIlsLeGaYNZCyq1qi/Xrjlzf5PWsfXXhe/DQ3PYRetcZYoMz0nFo5ipChgmj1lBlYiukCL36StxbPG91dX4dcz+b41LGZcpSK4W1IChivJaRFeWQMBtzoW0iqZHapBuE+zuEZlRvnJRW7E6I5TnVMl5iVDApEMCiFRwpESrdpo6HkTqeJL1Bbaeqx8xuXsRTI4whVstUuvaKJUqwtcTgWtYMWWZjZkSiHDmgMo+9JUN/w1PEShkGRktUdlt+PggOeU7RiCAVsaCoJknMEBmx6xun2GRpDACpNYmLRiUk2fDW251uYPegYlWaTrKU0wxJkiJVjGjJ0qWGbkPs/+nwjKNBA7HbHsNQK26EfOzMnqARqYsOzQUmPs3FcsMb+be0/DQfOlN7h3nT3jDd6XbbqrciSO7enoDkYWWga1w2itcNqh9blaN229t9M+Bdf0cEkTZl7mRmBhk1yspkOdU/hHsVaw9GU+TGcfb8oYgGWPdDK2ihheDKsFssx05f2aDG4OlijnwNTW48Sc7S5MKNu2Tae2vJXd5igiaZyCjnxkgq1Iomevso58Y9ru1jwOeNyIrHyM8vWha9IvKYSPbp7ciUv6ZVOJTeipC0O4frqgjfZiC4CqLwV3bav0dYj52lYUSwcM9/7l3atnd95b2wmpsjb1y6KmDY+APg3/9yIovB119w/C0JzVcghV/tGHSBf1lMXcmr9a4CtLuxZfGuRhS7yFAxg0b6N7sWP60M5r3Py3Jmmw/VW3s6I8Ilzn7/Ah2vLJr+m6bzkblwMiesq6r1YM+2aBYQ5agoZrfUBI2tSCRnJtXM/ymytolPuDBpZpTOOFXGpglQdS9NyroadV698g2WhAPn2j+jUBQsJwoBt938A+jmH08Kud+j+ykYMlnsZjVqmyEYfA8lLnA38L/1eK50ObzJe+nwZPIf6QHizUEsAAA=&quot;"/>
+    <we:property name="bookmark" value="&quot;H4sIAAAAAAAAA+1abW/bNhD+K4a+9EsS8EWiyH5r0xQblm5dE6QYhmI4kidHrSx5kpzFC/zfR1J24jR+S5t0eTEQODbvRN495D13J+kisnkzLGD8Kwwwehm9rqovA6i/9Gi0E5XdGBWx1lZSJRSxDKkhBJy0GrZ5VTbRy4uohbqP7UnejKDwE7nBPz/tRFAU76Hvf2VQNLgTDbFuqhKK/F/slJ2orUc42YnwfFhUNfgpj1po0U975tTdb2/CHncrgmnzMzxC03ajJpFApOScgOSUWYGMOLWmUwiWLVTxU4fl96uyhbx0y/ixxEpp0BAmSaylsoSlqR/P8qKdqujxwfmwdt5dXIEjaSYZ1wQI04oDox66djz00lf2DEqDNgoO1th0/lxEP+VYQ21Ox4d4hoUfOVgsvyl6X1cOx3Z8AnXe4VWNaoM3FbvxD5gFUdnmrZsteuPAbaKJg3y65ZfzOCNnc0/1gtqcKWGwdzXgxVMHnKj7fVr9s1+j07PRSzrZuQQKgfPYpkJYJMQkMZKEXAG17y7oV3VuoHCDHeLe7JPZEWA70du6GgTop4YPnOalW++gdEdtgGXbO0bwouMwM5m4g/jxFGsMl7odt3k7Bejn8jpozVSlGA3KNXDOMHdGeKfncPuAfX/BxK97AsUoBIOb9jB3LkHY6jDsVF98xKZ94VU/TdzH5OtDspElSxFYZtfyLZI6QcSUUEiN4pyhXr5FT/04v3PUcHoDLXIdLS1iDpqROLYElJLiuaL1+whqH7Gr8CLKGGNTxUTCCWH+H3+WTPkHwk2k5uMQMLUZNxhTTqVKBCi9CVKv+v0a+zBjt4Pv4JKjtqqxdwTFFIA5b/1g79WgGpVtEL0dldN8TFbtfqYNTZhKteN+yaUkLlH+WJ9+KwuX6pc71fSOq9ZF6xqnwkatM/vO0F54VkjIFU1e9otpHXVV0nRZL/Ku7p+6oPSFmv7sKiJfv0xmNZRb4fNclTQlq/Hm+e82tj/FGL4iPJ+6dyITSx5jZog2rhBMjObI19aOhvAEM50aZjUFVxYllG1LogdVEmUc4iTV3BLN3C6RGOMfTMX3QFurapPbGedssSPPLV8ZdkkoC1PCI0xkawnXBLMWUm5VW6xfd+T6Jq9n7asL34OH5raP0LvOEBuckY5DM1cRMkwYtYYqE1shRejVV+Le4nmrq/PrmPvZHJcyLlOWWimsBUER47WMrCiHhNmYC20TSY3UJt0g3N8hNKN646S0YndCLM+JlvESo4JJgQAWreBIiVDpNnU8jNTxJOkNajsVPWZ280M8NcIYYrVMpWuvWKIEW0sMrmXNkGU2ZkYkypEDKvPYWzL0NzxFrJRhYLREZbfl54PgkOcUjQhSEQuKapLEDJERu75xik2WxgCQWpO4aFRCkg1vvd3pBnYPKlal6SRLOc2QJClSxYiWLF1q6DbE/p8OzzgaNBC77TEMteJGyMfO7Akakbro0Fxg4tNcLDe8kX9Ly0/zoTO1d5g37Q3TnWy3rXorguTu7QlIHlYGusZlo3jdoPqxVTlqt73dNwPe9XdEEGlT5k5mZpBRo6xMllP9Q7hXsfZgNEVuHGfPH4pogHU/tIIWWgiuDLvFcuzklQ1iDJ4u5sjX0OTGk+QsTS7cuEumvbeW3OUtJmiSiYxyboykQq1oorePcm7c49o+BnzeiKx4jPz8omXRKyKPiWSf3o5M+WtahUPprQhJu3O4rorwbQaCqyAKf2Un/XuE9dhZGjSChXv+c+/Str3rK++F1dwceePSVQHDxh8A//6XG7IYfP0Fx9+S0HwFUvjVjkEX+JfF1JW8Wu8qQLsbWxbvakSxiwwVM2ikf7Nr8dPKYN77vCxntvlQvbWnMyJc4uz3L9DxyqLpv2k6H5kLJ3ODdVW1HuzZFs0CohwVxeyWmqCxFYnkzKSa+T9F1jbxCRcmzYzSGafK2DQBqu6lSVlXo86LV77BknDgXPtnFIqC5UQh4LabfwDd/ONJIfd7dD8FQyaL3axGbTMEg++hxAXuBv63Hs+VLoc3eS8dnkz+Ay2N/y9BLAAA&quot;"/>
     <we:property name="creatorSessionId" value="&quot;43a7240a-3c38-4667-9cab-0860d5086755&quot;"/>
     <we:property name="creatorTenantId" value="&quot;bbce5c37-f181-4d0c-9310-7f877336e1cf&quot;"/>
     <we:property name="creatorUserId" value="&quot;1003200509D80EC1&quot;"/>
@@ -9571,6 +12487,6 @@
     <we:property name="reportUrl" value="&quot;/groups/me/reports/4f91ce40-8c62-47bd-af1b-e802daed637e/c58a088330a8312d6e20?bookmarkGuid=f584905f-0b07-4afc-ab68-fb975c6c5347&amp;bookmarkUsage=1&amp;ctid=bbce5c37-f181-4d0c-9310-7f877336e1cf&amp;fromEntryPoint=export&quot;"/>
   </we:properties>
   <we:bindings/>
-  <we:snapshot xmlns:r="http://schemas.openxmlformats.org/officeDocument/2006/relationships"/>
+  <we:snapshot xmlns:r="http://schemas.openxmlformats.org/officeDocument/2006/relationships" r:embed="rId1"/>
 </we:webextension>
 </file>